--- a/department-course-clustering/reports/slides/progress_meeting_course_clustering.pptx
+++ b/department-course-clustering/reports/slides/progress_meeting_course_clustering.pptx
@@ -506,7 +506,7 @@
           <a:lstStyle/>
           <a:p>
             <a:r>
-              <a:t>이 프로젝트의 핵심은 학생에게 어떤 학과를 추천할 것인가를 바로 결정하는 시스템이 아닙니다. 현재 목표는 학과별 추천 고등학교 과목 정보를 사용했을 때, 학과들이 의미 있게 묶이는지 확인하는 탐색적 clustering입니다. 결과는 상담을 보조하기 위한 분석 자료로 보는 것이 적절합니다.</a:t>
+              <a:t>첫 장에서는 추천 시스템이 아니라 탐색적 군집화 연구라는 점을 먼저 고정한다.</a:t>
             </a:r>
           </a:p>
         </p:txBody>
@@ -576,7 +576,7 @@
           <a:lstStyle/>
           <a:p>
             <a:r>
-              <a:t>24개 학과는 전체 학과를 통계적으로 대표하기 위한 무작위 표본이 아닙니다. 짧은 기간 안에 clustering 가능성과 해석 가능성을 확인하기 위해, 과목 프로필 다양성, 상담 관련성, 해석 가능성을 기준으로 목적 표본을 구성했습니다.</a:t>
+              <a:t>표본은 대표성이 아니라 비교 가능성과 해석 가능성을 위해 고른 목적 표본이다.</a:t>
             </a:r>
           </a:p>
         </p:txBody>
@@ -646,7 +646,7 @@
           <a:lstStyle/>
           <a:p>
             <a:r>
-              <a:t>분석의 핵심 데이터는 department-course matrix입니다. 각 행은 학과이고 각 열은 추천 과목입니다. 값은 핵심 추천 과목 1.0, 관련 또는 보조 과목 0.5, 언급되지 않은 과목 0.0으로 구성했습니다. clustering에는 과목 열만 사용하고 metadata는 feature에서 제외했습니다.</a:t>
+              <a:t>dendrogram은 hard clustering보다 학과 간 가까움과 멀어짐을 설명하는 보조 도구로 사용한다.</a:t>
             </a:r>
           </a:p>
         </p:txBody>
@@ -716,7 +716,7 @@
           <a:lstStyle/>
           <a:p>
             <a:r>
-              <a:t>현재 구현된 첫 번째 방법은 hierarchical clustering입니다. 학과 간 유사도는 학과명이나 계열 정보가 아니라 추천 과목 프로필만으로 계산됩니다. similarity matrix, heatmap, dendrogram, cluster assignment를 예비 결과로 볼 수 있습니다. 다만 이 결과는 최종 분류가 아니라 exploratory result로 해석해야 합니다.</a:t>
+              <a:t>예비 결과는 예쁘게 잘린 군집보다 boundary case와 local similarity를 보여주는 데 의미가 있다.</a:t>
             </a:r>
           </a:p>
         </p:txBody>
@@ -786,7 +786,7 @@
           <a:lstStyle/>
           <a:p>
             <a:r>
-              <a:t>다음 단계에서는 hierarchical clustering 결과만으로 결론을 내리지 않고 k-means clustering과 비교해 군집 구조의 안정성을 확인할 계획입니다. 또한 binary vector를 사용한 sensitivity analysis를 수행할 수 있습니다. expert consensus와 admission feasibility는 future work로 남겨두겠습니다.</a:t>
+              <a:t>마지막 장에서는 범위 확장을 막고 final report에서 할 일만 보수적으로 제시한다.</a:t>
             </a:r>
           </a:p>
         </p:txBody>
@@ -3809,7 +3809,7 @@
         <p:spPr>
           <a:xfrm>
             <a:off x="502920" y="228600"/>
-            <a:ext cx="11155680" cy="502920"/>
+            <a:ext cx="8961120" cy="411480"/>
           </a:xfrm>
           <a:prstGeom prst="rect">
             <a:avLst/>
@@ -3825,33 +3825,69 @@
             <a:pPr>
               <a:defRPr sz="2400" b="1">
                 <a:solidFill>
-                  <a:srgbClr val="202D3F"/>
+                  <a:srgbClr val="1F2B3D"/>
                 </a:solidFill>
                 <a:latin typeface="Aptos Display"/>
               </a:defRPr>
             </a:pPr>
             <a:r>
-              <a:t>Project Overview</a:t>
-            </a:r>
-          </a:p>
-        </p:txBody>
-      </p:sp>
-      <p:sp>
-        <p:nvSpPr>
-          <p:cNvPr id="3" name="Rectangle 2"/>
-          <p:cNvSpPr/>
+              <a:t>권장과목 기반 학과 군집화</a:t>
+            </a:r>
+          </a:p>
+        </p:txBody>
+      </p:sp>
+      <p:sp>
+        <p:nvSpPr>
+          <p:cNvPr id="3" name="TextBox 2"/>
+          <p:cNvSpPr txBox="1"/>
           <p:nvPr/>
         </p:nvSpPr>
         <p:spPr>
           <a:xfrm>
-            <a:off x="502920" y="804672"/>
-            <a:ext cx="1051560" cy="54864"/>
+            <a:off x="530352" y="685800"/>
+            <a:ext cx="8961120" cy="256032"/>
           </a:xfrm>
           <a:prstGeom prst="rect">
             <a:avLst/>
           </a:prstGeom>
+          <a:noFill/>
+        </p:spPr>
+        <p:txBody>
+          <a:bodyPr wrap="none">
+            <a:spAutoFit/>
+          </a:bodyPr>
+          <a:lstStyle/>
+          <a:p>
+            <a:pPr>
+              <a:defRPr sz="1100">
+                <a:solidFill>
+                  <a:srgbClr val="616A74"/>
+                </a:solidFill>
+                <a:latin typeface="Aptos"/>
+              </a:defRPr>
+            </a:pPr>
+            <a:r>
+              <a:t>입시 상담 지원을 위한 탐색적 분석 · Progress Update</a:t>
+            </a:r>
+          </a:p>
+        </p:txBody>
+      </p:sp>
+      <p:sp>
+        <p:nvSpPr>
+          <p:cNvPr id="4" name="Rounded Rectangle 3"/>
+          <p:cNvSpPr/>
+          <p:nvPr/>
+        </p:nvSpPr>
+        <p:spPr>
+          <a:xfrm>
+            <a:off x="10698480" y="292608"/>
+            <a:ext cx="960120" cy="347472"/>
+          </a:xfrm>
+          <a:prstGeom prst="roundRect">
+            <a:avLst/>
+          </a:prstGeom>
           <a:solidFill>
-            <a:srgbClr val="278E89"/>
+            <a:srgbClr val="1F2B3D"/>
           </a:solidFill>
           <a:ln>
             <a:noFill/>
@@ -3875,20 +3911,30 @@
           <a:bodyPr rtlCol="0" anchor="ctr"/>
           <a:lstStyle/>
           <a:p>
-            <a:pPr algn="ctr"/>
-          </a:p>
-        </p:txBody>
-      </p:sp>
-      <p:sp>
-        <p:nvSpPr>
-          <p:cNvPr id="4" name="TextBox 3"/>
+            <a:pPr algn="ctr">
+              <a:defRPr sz="1000" b="1">
+                <a:solidFill>
+                  <a:srgbClr val="FFFFFF"/>
+                </a:solidFill>
+                <a:latin typeface="Aptos"/>
+              </a:defRPr>
+            </a:pPr>
+            <a:r>
+              <a:t>1 / 5</a:t>
+            </a:r>
+          </a:p>
+        </p:txBody>
+      </p:sp>
+      <p:sp>
+        <p:nvSpPr>
+          <p:cNvPr id="5" name="TextBox 4"/>
           <p:cNvSpPr txBox="1"/>
           <p:nvPr/>
         </p:nvSpPr>
         <p:spPr>
           <a:xfrm>
-            <a:off x="777240" y="1234440"/>
-            <a:ext cx="4983480" cy="2880360"/>
+            <a:off x="502920" y="6446520"/>
+            <a:ext cx="11155680" cy="228600"/>
           </a:xfrm>
           <a:prstGeom prst="rect">
             <a:avLst/>
@@ -3896,109 +3942,6 @@
           <a:noFill/>
         </p:spPr>
         <p:txBody>
-          <a:bodyPr wrap="square">
-            <a:normAutofit/>
-          </a:bodyPr>
-          <a:lstStyle/>
-          <a:p>
-            <a:pPr>
-              <a:spcAft>
-                <a:spcPts val="700"/>
-              </a:spcAft>
-              <a:defRPr sz="1700">
-                <a:solidFill>
-                  <a:srgbClr val="262A30"/>
-                </a:solidFill>
-                <a:latin typeface="Aptos"/>
-              </a:defRPr>
-            </a:pPr>
-            <a:r>
-              <a:t>Exploratory clustering of academic departments using recommended high-school course profiles</a:t>
-            </a:r>
-          </a:p>
-          <a:p>
-            <a:pPr>
-              <a:spcAft>
-                <a:spcPts val="700"/>
-              </a:spcAft>
-              <a:defRPr sz="1700">
-                <a:solidFill>
-                  <a:srgbClr val="262A30"/>
-                </a:solidFill>
-                <a:latin typeface="Aptos"/>
-              </a:defRPr>
-            </a:pPr>
-            <a:r>
-              <a:t>Designed to support admission counseling, not to replace counseling decisions</a:t>
-            </a:r>
-          </a:p>
-          <a:p>
-            <a:pPr>
-              <a:spcAft>
-                <a:spcPts val="700"/>
-              </a:spcAft>
-              <a:defRPr sz="1700">
-                <a:solidFill>
-                  <a:srgbClr val="262A30"/>
-                </a:solidFill>
-                <a:latin typeface="Aptos"/>
-              </a:defRPr>
-            </a:pPr>
-            <a:r>
-              <a:t>The project is not a complete department recommendation system</a:t>
-            </a:r>
-          </a:p>
-          <a:p>
-            <a:pPr>
-              <a:spcAft>
-                <a:spcPts val="700"/>
-              </a:spcAft>
-              <a:defRPr sz="1700">
-                <a:solidFill>
-                  <a:srgbClr val="262A30"/>
-                </a:solidFill>
-                <a:latin typeface="Aptos"/>
-              </a:defRPr>
-            </a:pPr>
-            <a:r>
-              <a:t>Main question: can course profiles produce interpretable department clusters?</a:t>
-            </a:r>
-          </a:p>
-          <a:p>
-            <a:pPr>
-              <a:spcAft>
-                <a:spcPts val="700"/>
-              </a:spcAft>
-              <a:defRPr sz="1700">
-                <a:solidFill>
-                  <a:srgbClr val="262A30"/>
-                </a:solidFill>
-                <a:latin typeface="Aptos"/>
-              </a:defRPr>
-            </a:pPr>
-            <a:r>
-              <a:t>Current stage focuses on data structure and preliminary clustering results</a:t>
-            </a:r>
-          </a:p>
-        </p:txBody>
-      </p:sp>
-      <p:sp>
-        <p:nvSpPr>
-          <p:cNvPr id="5" name="TextBox 4"/>
-          <p:cNvSpPr txBox="1"/>
-          <p:nvPr/>
-        </p:nvSpPr>
-        <p:spPr>
-          <a:xfrm>
-            <a:off x="502920" y="6446520"/>
-            <a:ext cx="11064240" cy="201168"/>
-          </a:xfrm>
-          <a:prstGeom prst="rect">
-            <a:avLst/>
-          </a:prstGeom>
-          <a:noFill/>
-        </p:spPr>
-        <p:txBody>
           <a:bodyPr wrap="none">
             <a:spAutoFit/>
           </a:bodyPr>
@@ -4007,13 +3950,13 @@
             <a:pPr>
               <a:defRPr sz="800">
                 <a:solidFill>
-                  <a:srgbClr val="636C76"/>
+                  <a:srgbClr val="616A74"/>
                 </a:solidFill>
                 <a:latin typeface="Aptos"/>
               </a:defRPr>
             </a:pPr>
             <a:r>
-              <a:t>NOVA50301 AI Toolkit Progress Meeting | 1/5</a:t>
+              <a:t>NOVA50301 AI Toolkit · Progress Meeting · 1/5</a:t>
             </a:r>
           </a:p>
         </p:txBody>
@@ -4026,19 +3969,17 @@
         </p:nvSpPr>
         <p:spPr>
           <a:xfrm>
-            <a:off x="777240" y="4754880"/>
-            <a:ext cx="2103120" cy="621792"/>
+            <a:off x="594360" y="1234440"/>
+            <a:ext cx="960120" cy="292608"/>
           </a:xfrm>
           <a:prstGeom prst="roundRect">
             <a:avLst/>
           </a:prstGeom>
           <a:solidFill>
-            <a:srgbClr val="278E89"/>
+            <a:srgbClr val="208782"/>
           </a:solidFill>
           <a:ln>
-            <a:solidFill>
-              <a:srgbClr val="278E89"/>
-            </a:solidFill>
+            <a:noFill/>
           </a:ln>
         </p:spPr>
         <p:style>
@@ -4060,7 +4001,7 @@
           <a:lstStyle/>
           <a:p>
             <a:pPr algn="ctr">
-              <a:defRPr sz="1200" b="1">
+              <a:defRPr sz="1000" b="1">
                 <a:solidFill>
                   <a:srgbClr val="FFFFFF"/>
                 </a:solidFill>
@@ -4068,25 +4009,356 @@
               </a:defRPr>
             </a:pPr>
             <a:r>
-              <a:t>Department</a:t>
-            </a:r>
-            <a:br/>
-            <a:r>
-              <a:t>selection</a:t>
-            </a:r>
-          </a:p>
-        </p:txBody>
-      </p:sp>
-      <p:sp>
-        <p:nvSpPr>
-          <p:cNvPr id="7" name="Right Arrow 6"/>
+              <a:t>핵심 질문</a:t>
+            </a:r>
+          </a:p>
+        </p:txBody>
+      </p:sp>
+      <p:sp>
+        <p:nvSpPr>
+          <p:cNvPr id="7" name="Rounded Rectangle 6"/>
           <p:cNvSpPr/>
           <p:nvPr/>
         </p:nvSpPr>
         <p:spPr>
           <a:xfrm>
-            <a:off x="2990088" y="4882896"/>
-            <a:ext cx="438912" cy="292608"/>
+            <a:off x="594360" y="1627632"/>
+            <a:ext cx="5074920" cy="1051560"/>
+          </a:xfrm>
+          <a:prstGeom prst="roundRect">
+            <a:avLst/>
+          </a:prstGeom>
+          <a:solidFill>
+            <a:srgbClr val="FFFFFF"/>
+          </a:solidFill>
+          <a:ln>
+            <a:solidFill>
+              <a:srgbClr val="D6DBE1"/>
+            </a:solidFill>
+          </a:ln>
+        </p:spPr>
+        <p:style>
+          <a:lnRef idx="1">
+            <a:schemeClr val="accent1"/>
+          </a:lnRef>
+          <a:fillRef idx="3">
+            <a:schemeClr val="accent1"/>
+          </a:fillRef>
+          <a:effectRef idx="2">
+            <a:schemeClr val="accent1"/>
+          </a:effectRef>
+          <a:fontRef idx="minor">
+            <a:schemeClr val="lt1"/>
+          </a:fontRef>
+        </p:style>
+        <p:txBody>
+          <a:bodyPr rtlCol="0" anchor="ctr" wrap="square">
+            <a:normAutofit/>
+          </a:bodyPr>
+          <a:lstStyle/>
+          <a:p>
+            <a:pPr algn="ctr">
+              <a:spcAft>
+                <a:spcPts val="400"/>
+              </a:spcAft>
+              <a:defRPr sz="1100" b="1">
+                <a:solidFill>
+                  <a:srgbClr val="1F2B3D"/>
+                </a:solidFill>
+                <a:latin typeface="Aptos"/>
+              </a:defRPr>
+            </a:pPr>
+            <a:r>
+              <a:t>Research Question</a:t>
+            </a:r>
+          </a:p>
+          <a:p>
+            <a:pPr>
+              <a:defRPr sz="1000">
+                <a:solidFill>
+                  <a:srgbClr val="272B32"/>
+                </a:solidFill>
+                <a:latin typeface="Aptos"/>
+              </a:defRPr>
+            </a:pPr>
+            <a:r>
+              <a:t>권장과목 profile이 학과들을 해석 가능한 방식으로 군집화할 수 있는가?</a:t>
+            </a:r>
+          </a:p>
+        </p:txBody>
+      </p:sp>
+      <p:sp>
+        <p:nvSpPr>
+          <p:cNvPr id="8" name="Rounded Rectangle 7"/>
+          <p:cNvSpPr/>
+          <p:nvPr/>
+        </p:nvSpPr>
+        <p:spPr>
+          <a:xfrm>
+            <a:off x="6080760" y="1234440"/>
+            <a:ext cx="777240" cy="292608"/>
+          </a:xfrm>
+          <a:prstGeom prst="roundRect">
+            <a:avLst/>
+          </a:prstGeom>
+          <a:solidFill>
+            <a:srgbClr val="1F2B3D"/>
+          </a:solidFill>
+          <a:ln>
+            <a:noFill/>
+          </a:ln>
+        </p:spPr>
+        <p:style>
+          <a:lnRef idx="1">
+            <a:schemeClr val="accent1"/>
+          </a:lnRef>
+          <a:fillRef idx="3">
+            <a:schemeClr val="accent1"/>
+          </a:fillRef>
+          <a:effectRef idx="2">
+            <a:schemeClr val="accent1"/>
+          </a:effectRef>
+          <a:fontRef idx="minor">
+            <a:schemeClr val="lt1"/>
+          </a:fontRef>
+        </p:style>
+        <p:txBody>
+          <a:bodyPr rtlCol="0" anchor="ctr"/>
+          <a:lstStyle/>
+          <a:p>
+            <a:pPr algn="ctr">
+              <a:defRPr sz="1000" b="1">
+                <a:solidFill>
+                  <a:srgbClr val="FFFFFF"/>
+                </a:solidFill>
+                <a:latin typeface="Aptos"/>
+              </a:defRPr>
+            </a:pPr>
+            <a:r>
+              <a:t>Scope</a:t>
+            </a:r>
+          </a:p>
+        </p:txBody>
+      </p:sp>
+      <p:sp>
+        <p:nvSpPr>
+          <p:cNvPr id="9" name="Rounded Rectangle 8"/>
+          <p:cNvSpPr/>
+          <p:nvPr/>
+        </p:nvSpPr>
+        <p:spPr>
+          <a:xfrm>
+            <a:off x="6080760" y="1627632"/>
+            <a:ext cx="5440680" cy="1051560"/>
+          </a:xfrm>
+          <a:prstGeom prst="roundRect">
+            <a:avLst/>
+          </a:prstGeom>
+          <a:solidFill>
+            <a:srgbClr val="F4F6F8"/>
+          </a:solidFill>
+          <a:ln>
+            <a:solidFill>
+              <a:srgbClr val="D6DBE1"/>
+            </a:solidFill>
+          </a:ln>
+        </p:spPr>
+        <p:style>
+          <a:lnRef idx="1">
+            <a:schemeClr val="accent1"/>
+          </a:lnRef>
+          <a:fillRef idx="3">
+            <a:schemeClr val="accent1"/>
+          </a:fillRef>
+          <a:effectRef idx="2">
+            <a:schemeClr val="accent1"/>
+          </a:effectRef>
+          <a:fontRef idx="minor">
+            <a:schemeClr val="lt1"/>
+          </a:fontRef>
+        </p:style>
+        <p:txBody>
+          <a:bodyPr rtlCol="0" anchor="ctr" wrap="square">
+            <a:normAutofit/>
+          </a:bodyPr>
+          <a:lstStyle/>
+          <a:p>
+            <a:pPr algn="ctr">
+              <a:spcAft>
+                <a:spcPts val="400"/>
+              </a:spcAft>
+              <a:defRPr sz="1100" b="1">
+                <a:solidFill>
+                  <a:srgbClr val="1F2B3D"/>
+                </a:solidFill>
+                <a:latin typeface="Aptos"/>
+              </a:defRPr>
+            </a:pPr>
+            <a:r>
+              <a:t>Progress-stage scope</a:t>
+            </a:r>
+          </a:p>
+          <a:p>
+            <a:pPr>
+              <a:defRPr sz="1000">
+                <a:solidFill>
+                  <a:srgbClr val="272B32"/>
+                </a:solidFill>
+                <a:latin typeface="Aptos"/>
+              </a:defRPr>
+            </a:pPr>
+            <a:r>
+              <a:t>탐색적 군집화 연구 (학과 추천 시스템 X)</a:t>
+            </a:r>
+            <a:br/>
+            <a:r>
+              <a:t>25개 학과 목적 표본 · binary vector · hierarchical clustering</a:t>
+            </a:r>
+          </a:p>
+        </p:txBody>
+      </p:sp>
+      <p:sp>
+        <p:nvSpPr>
+          <p:cNvPr id="10" name="Rounded Rectangle 9"/>
+          <p:cNvSpPr/>
+          <p:nvPr/>
+        </p:nvSpPr>
+        <p:spPr>
+          <a:xfrm>
+            <a:off x="594360" y="4251960"/>
+            <a:ext cx="868680" cy="292608"/>
+          </a:xfrm>
+          <a:prstGeom prst="roundRect">
+            <a:avLst/>
+          </a:prstGeom>
+          <a:solidFill>
+            <a:srgbClr val="D69744"/>
+          </a:solidFill>
+          <a:ln>
+            <a:noFill/>
+          </a:ln>
+        </p:spPr>
+        <p:style>
+          <a:lnRef idx="1">
+            <a:schemeClr val="accent1"/>
+          </a:lnRef>
+          <a:fillRef idx="3">
+            <a:schemeClr val="accent1"/>
+          </a:fillRef>
+          <a:effectRef idx="2">
+            <a:schemeClr val="accent1"/>
+          </a:effectRef>
+          <a:fontRef idx="minor">
+            <a:schemeClr val="lt1"/>
+          </a:fontRef>
+        </p:style>
+        <p:txBody>
+          <a:bodyPr rtlCol="0" anchor="ctr"/>
+          <a:lstStyle/>
+          <a:p>
+            <a:pPr algn="ctr">
+              <a:defRPr sz="1000" b="1">
+                <a:solidFill>
+                  <a:srgbClr val="FFFFFF"/>
+                </a:solidFill>
+                <a:latin typeface="Aptos"/>
+              </a:defRPr>
+            </a:pPr>
+            <a:r>
+              <a:t>Pipeline</a:t>
+            </a:r>
+          </a:p>
+        </p:txBody>
+      </p:sp>
+      <p:sp>
+        <p:nvSpPr>
+          <p:cNvPr id="11" name="Rounded Rectangle 10"/>
+          <p:cNvSpPr/>
+          <p:nvPr/>
+        </p:nvSpPr>
+        <p:spPr>
+          <a:xfrm>
+            <a:off x="594360" y="4709160"/>
+            <a:ext cx="1965960" cy="804672"/>
+          </a:xfrm>
+          <a:prstGeom prst="roundRect">
+            <a:avLst/>
+          </a:prstGeom>
+          <a:solidFill>
+            <a:srgbClr val="208782"/>
+          </a:solidFill>
+          <a:ln>
+            <a:noFill/>
+          </a:ln>
+        </p:spPr>
+        <p:style>
+          <a:lnRef idx="1">
+            <a:schemeClr val="accent1"/>
+          </a:lnRef>
+          <a:fillRef idx="3">
+            <a:schemeClr val="accent1"/>
+          </a:fillRef>
+          <a:effectRef idx="2">
+            <a:schemeClr val="accent1"/>
+          </a:effectRef>
+          <a:fontRef idx="minor">
+            <a:schemeClr val="lt1"/>
+          </a:fontRef>
+        </p:style>
+        <p:txBody>
+          <a:bodyPr rtlCol="0" anchor="ctr"/>
+          <a:lstStyle/>
+          <a:p>
+            <a:pPr algn="ctr">
+              <a:defRPr sz="1000" b="1">
+                <a:solidFill>
+                  <a:srgbClr val="FFFFFF"/>
+                </a:solidFill>
+                <a:latin typeface="Aptos"/>
+              </a:defRPr>
+            </a:pPr>
+            <a:r>
+              <a:t>1</a:t>
+            </a:r>
+          </a:p>
+          <a:p>
+            <a:pPr>
+              <a:defRPr sz="1200" b="1">
+                <a:solidFill>
+                  <a:srgbClr val="FFFFFF"/>
+                </a:solidFill>
+                <a:latin typeface="Aptos"/>
+              </a:defRPr>
+            </a:pPr>
+            <a:r>
+              <a:t>학과 선정</a:t>
+            </a:r>
+          </a:p>
+          <a:p>
+            <a:pPr>
+              <a:defRPr sz="850">
+                <a:solidFill>
+                  <a:srgbClr val="FFFFFF"/>
+                </a:solidFill>
+                <a:latin typeface="Aptos"/>
+              </a:defRPr>
+            </a:pPr>
+            <a:r>
+              <a:t>25개 목적 표본</a:t>
+            </a:r>
+          </a:p>
+        </p:txBody>
+      </p:sp>
+      <p:sp>
+        <p:nvSpPr>
+          <p:cNvPr id="12" name="Right Arrow 11"/>
+          <p:cNvSpPr/>
+          <p:nvPr/>
+        </p:nvSpPr>
+        <p:spPr>
+          <a:xfrm>
+            <a:off x="2624328" y="4965192"/>
+            <a:ext cx="310896" cy="256032"/>
           </a:xfrm>
           <a:prstGeom prst="rightArrow">
             <a:avLst/>
@@ -4122,25 +4394,23 @@
       </p:sp>
       <p:sp>
         <p:nvSpPr>
-          <p:cNvPr id="8" name="Rounded Rectangle 7"/>
+          <p:cNvPr id="13" name="Rounded Rectangle 12"/>
           <p:cNvSpPr/>
           <p:nvPr/>
         </p:nvSpPr>
         <p:spPr>
           <a:xfrm>
-            <a:off x="3566160" y="4754880"/>
-            <a:ext cx="2103120" cy="621792"/>
+            <a:off x="2898648" y="4709160"/>
+            <a:ext cx="1965960" cy="804672"/>
           </a:xfrm>
           <a:prstGeom prst="roundRect">
             <a:avLst/>
           </a:prstGeom>
           <a:solidFill>
-            <a:srgbClr val="5C9760"/>
+            <a:srgbClr val="539160"/>
           </a:solidFill>
           <a:ln>
-            <a:solidFill>
-              <a:srgbClr val="5C9760"/>
-            </a:solidFill>
+            <a:noFill/>
           </a:ln>
         </p:spPr>
         <p:style>
@@ -4162,6 +4432,19 @@
           <a:lstStyle/>
           <a:p>
             <a:pPr algn="ctr">
+              <a:defRPr sz="1000" b="1">
+                <a:solidFill>
+                  <a:srgbClr val="FFFFFF"/>
+                </a:solidFill>
+                <a:latin typeface="Aptos"/>
+              </a:defRPr>
+            </a:pPr>
+            <a:r>
+              <a:t>2</a:t>
+            </a:r>
+          </a:p>
+          <a:p>
+            <a:pPr>
               <a:defRPr sz="1200" b="1">
                 <a:solidFill>
                   <a:srgbClr val="FFFFFF"/>
@@ -4170,25 +4453,34 @@
               </a:defRPr>
             </a:pPr>
             <a:r>
-              <a:t>Course-profile</a:t>
-            </a:r>
-            <a:br/>
-            <a:r>
-              <a:t>matrix</a:t>
-            </a:r>
-          </a:p>
-        </p:txBody>
-      </p:sp>
-      <p:sp>
-        <p:nvSpPr>
-          <p:cNvPr id="9" name="Right Arrow 8"/>
+              <a:t>데이터 구성</a:t>
+            </a:r>
+          </a:p>
+          <a:p>
+            <a:pPr>
+              <a:defRPr sz="850">
+                <a:solidFill>
+                  <a:srgbClr val="FFFFFF"/>
+                </a:solidFill>
+                <a:latin typeface="Aptos"/>
+              </a:defRPr>
+            </a:pPr>
+            <a:r>
+              <a:t>학과×과목 binary matrix</a:t>
+            </a:r>
+          </a:p>
+        </p:txBody>
+      </p:sp>
+      <p:sp>
+        <p:nvSpPr>
+          <p:cNvPr id="14" name="Right Arrow 13"/>
           <p:cNvSpPr/>
           <p:nvPr/>
         </p:nvSpPr>
         <p:spPr>
           <a:xfrm>
-            <a:off x="5779008" y="4882896"/>
-            <a:ext cx="438912" cy="292608"/>
+            <a:off x="4928616" y="4965192"/>
+            <a:ext cx="310896" cy="256032"/>
           </a:xfrm>
           <a:prstGeom prst="rightArrow">
             <a:avLst/>
@@ -4224,14 +4516,14 @@
       </p:sp>
       <p:sp>
         <p:nvSpPr>
-          <p:cNvPr id="10" name="Rounded Rectangle 9"/>
+          <p:cNvPr id="15" name="Rounded Rectangle 14"/>
           <p:cNvSpPr/>
           <p:nvPr/>
         </p:nvSpPr>
         <p:spPr>
           <a:xfrm>
-            <a:off x="6355079" y="4754880"/>
-            <a:ext cx="2103120" cy="621792"/>
+            <a:off x="5202936" y="4709160"/>
+            <a:ext cx="1965960" cy="804672"/>
           </a:xfrm>
           <a:prstGeom prst="roundRect">
             <a:avLst/>
@@ -4240,9 +4532,7 @@
             <a:srgbClr val="D69744"/>
           </a:solidFill>
           <a:ln>
-            <a:solidFill>
-              <a:srgbClr val="D69744"/>
-            </a:solidFill>
+            <a:noFill/>
           </a:ln>
         </p:spPr>
         <p:style>
@@ -4264,6 +4554,19 @@
           <a:lstStyle/>
           <a:p>
             <a:pPr algn="ctr">
+              <a:defRPr sz="1000" b="1">
+                <a:solidFill>
+                  <a:srgbClr val="FFFFFF"/>
+                </a:solidFill>
+                <a:latin typeface="Aptos"/>
+              </a:defRPr>
+            </a:pPr>
+            <a:r>
+              <a:t>3</a:t>
+            </a:r>
+          </a:p>
+          <a:p>
+            <a:pPr>
               <a:defRPr sz="1200" b="1">
                 <a:solidFill>
                   <a:srgbClr val="FFFFFF"/>
@@ -4272,25 +4575,34 @@
               </a:defRPr>
             </a:pPr>
             <a:r>
-              <a:t>Hierarchical</a:t>
-            </a:r>
-            <a:br/>
-            <a:r>
-              <a:t>clustering</a:t>
-            </a:r>
-          </a:p>
-        </p:txBody>
-      </p:sp>
-      <p:sp>
-        <p:nvSpPr>
-          <p:cNvPr id="11" name="Right Arrow 10"/>
+              <a:t>유사도 계산</a:t>
+            </a:r>
+          </a:p>
+          <a:p>
+            <a:pPr>
+              <a:defRPr sz="850">
+                <a:solidFill>
+                  <a:srgbClr val="FFFFFF"/>
+                </a:solidFill>
+                <a:latin typeface="Aptos"/>
+              </a:defRPr>
+            </a:pPr>
+            <a:r>
+              <a:t>Cosine similarity</a:t>
+            </a:r>
+          </a:p>
+        </p:txBody>
+      </p:sp>
+      <p:sp>
+        <p:nvSpPr>
+          <p:cNvPr id="16" name="Right Arrow 15"/>
           <p:cNvSpPr/>
           <p:nvPr/>
         </p:nvSpPr>
         <p:spPr>
           <a:xfrm>
-            <a:off x="8567928" y="4882896"/>
-            <a:ext cx="438912" cy="292608"/>
+            <a:off x="7232904" y="4965192"/>
+            <a:ext cx="310896" cy="256032"/>
           </a:xfrm>
           <a:prstGeom prst="rightArrow">
             <a:avLst/>
@@ -4326,14 +4638,14 @@
       </p:sp>
       <p:sp>
         <p:nvSpPr>
-          <p:cNvPr id="12" name="Rounded Rectangle 11"/>
+          <p:cNvPr id="17" name="Rounded Rectangle 16"/>
           <p:cNvSpPr/>
           <p:nvPr/>
         </p:nvSpPr>
         <p:spPr>
           <a:xfrm>
-            <a:off x="9144000" y="4754880"/>
-            <a:ext cx="2103120" cy="621792"/>
+            <a:off x="7507223" y="4709160"/>
+            <a:ext cx="1965960" cy="804672"/>
           </a:xfrm>
           <a:prstGeom prst="roundRect">
             <a:avLst/>
@@ -4342,9 +4654,7 @@
             <a:srgbClr val="914348"/>
           </a:solidFill>
           <a:ln>
-            <a:solidFill>
-              <a:srgbClr val="914348"/>
-            </a:solidFill>
+            <a:noFill/>
           </a:ln>
         </p:spPr>
         <p:style>
@@ -4366,6 +4676,19 @@
           <a:lstStyle/>
           <a:p>
             <a:pPr algn="ctr">
+              <a:defRPr sz="1000" b="1">
+                <a:solidFill>
+                  <a:srgbClr val="FFFFFF"/>
+                </a:solidFill>
+                <a:latin typeface="Aptos"/>
+              </a:defRPr>
+            </a:pPr>
+            <a:r>
+              <a:t>4</a:t>
+            </a:r>
+          </a:p>
+          <a:p>
+            <a:pPr>
               <a:defRPr sz="1200" b="1">
                 <a:solidFill>
                   <a:srgbClr val="FFFFFF"/>
@@ -4374,47 +4697,142 @@
               </a:defRPr>
             </a:pPr>
             <a:r>
-              <a:t>Exploratory</a:t>
-            </a:r>
-            <a:br/>
-            <a:r>
-              <a:t>interpretation</a:t>
-            </a:r>
-          </a:p>
-        </p:txBody>
-      </p:sp>
-      <p:sp>
-        <p:nvSpPr>
-          <p:cNvPr id="13" name="TextBox 12"/>
-          <p:cNvSpPr txBox="1"/>
+              <a:t>군집화</a:t>
+            </a:r>
+          </a:p>
+          <a:p>
+            <a:pPr>
+              <a:defRPr sz="850">
+                <a:solidFill>
+                  <a:srgbClr val="FFFFFF"/>
+                </a:solidFill>
+                <a:latin typeface="Aptos"/>
+              </a:defRPr>
+            </a:pPr>
+            <a:r>
+              <a:t>Hierarchical clustering</a:t>
+            </a:r>
+          </a:p>
+        </p:txBody>
+      </p:sp>
+      <p:sp>
+        <p:nvSpPr>
+          <p:cNvPr id="18" name="Right Arrow 17"/>
+          <p:cNvSpPr/>
           <p:nvPr/>
         </p:nvSpPr>
         <p:spPr>
           <a:xfrm>
-            <a:off x="777240" y="5532120"/>
-            <a:ext cx="8229600" cy="228600"/>
-          </a:xfrm>
-          <a:prstGeom prst="rect">
+            <a:off x="9537192" y="4965192"/>
+            <a:ext cx="310896" cy="256032"/>
+          </a:xfrm>
+          <a:prstGeom prst="rightArrow">
             <a:avLst/>
           </a:prstGeom>
-          <a:noFill/>
-        </p:spPr>
-        <p:txBody>
-          <a:bodyPr wrap="square">
-            <a:spAutoFit/>
-          </a:bodyPr>
-          <a:lstStyle/>
+          <a:solidFill>
+            <a:srgbClr val="D6DBE1"/>
+          </a:solidFill>
+          <a:ln>
+            <a:noFill/>
+          </a:ln>
+        </p:spPr>
+        <p:style>
+          <a:lnRef idx="1">
+            <a:schemeClr val="accent1"/>
+          </a:lnRef>
+          <a:fillRef idx="3">
+            <a:schemeClr val="accent1"/>
+          </a:fillRef>
+          <a:effectRef idx="2">
+            <a:schemeClr val="accent1"/>
+          </a:effectRef>
+          <a:fontRef idx="minor">
+            <a:schemeClr val="lt1"/>
+          </a:fontRef>
+        </p:style>
+        <p:txBody>
+          <a:bodyPr rtlCol="0" anchor="ctr"/>
+          <a:lstStyle/>
+          <a:p>
+            <a:pPr algn="ctr"/>
+          </a:p>
+        </p:txBody>
+      </p:sp>
+      <p:sp>
+        <p:nvSpPr>
+          <p:cNvPr id="19" name="Rounded Rectangle 18"/>
+          <p:cNvSpPr/>
+          <p:nvPr/>
+        </p:nvSpPr>
+        <p:spPr>
+          <a:xfrm>
+            <a:off x="9811511" y="4709160"/>
+            <a:ext cx="1965960" cy="804672"/>
+          </a:xfrm>
+          <a:prstGeom prst="roundRect">
+            <a:avLst/>
+          </a:prstGeom>
+          <a:solidFill>
+            <a:srgbClr val="1F2B3D"/>
+          </a:solidFill>
+          <a:ln>
+            <a:noFill/>
+          </a:ln>
+        </p:spPr>
+        <p:style>
+          <a:lnRef idx="1">
+            <a:schemeClr val="accent1"/>
+          </a:lnRef>
+          <a:fillRef idx="3">
+            <a:schemeClr val="accent1"/>
+          </a:fillRef>
+          <a:effectRef idx="2">
+            <a:schemeClr val="accent1"/>
+          </a:effectRef>
+          <a:fontRef idx="minor">
+            <a:schemeClr val="lt1"/>
+          </a:fontRef>
+        </p:style>
+        <p:txBody>
+          <a:bodyPr rtlCol="0" anchor="ctr"/>
+          <a:lstStyle/>
+          <a:p>
+            <a:pPr algn="ctr">
+              <a:defRPr sz="1000" b="1">
+                <a:solidFill>
+                  <a:srgbClr val="FFFFFF"/>
+                </a:solidFill>
+                <a:latin typeface="Aptos"/>
+              </a:defRPr>
+            </a:pPr>
+            <a:r>
+              <a:t>5</a:t>
+            </a:r>
+          </a:p>
           <a:p>
             <a:pPr>
-              <a:defRPr sz="1000">
-                <a:solidFill>
-                  <a:srgbClr val="636C76"/>
+              <a:defRPr sz="1200" b="1">
+                <a:solidFill>
+                  <a:srgbClr val="FFFFFF"/>
                 </a:solidFill>
                 <a:latin typeface="Aptos"/>
               </a:defRPr>
             </a:pPr>
             <a:r>
-              <a:t>Recommended figure: project pipeline diagram</a:t>
+              <a:t>해석</a:t>
+            </a:r>
+          </a:p>
+          <a:p>
+            <a:pPr>
+              <a:defRPr sz="850">
+                <a:solidFill>
+                  <a:srgbClr val="FFFFFF"/>
+                </a:solidFill>
+                <a:latin typeface="Aptos"/>
+              </a:defRPr>
+            </a:pPr>
+            <a:r>
+              <a:t>상담 지원용 예비 근거</a:t>
             </a:r>
           </a:p>
         </p:txBody>
@@ -4454,7 +4872,7 @@
         <p:spPr>
           <a:xfrm>
             <a:off x="502920" y="228600"/>
-            <a:ext cx="11155680" cy="502920"/>
+            <a:ext cx="8961120" cy="411480"/>
           </a:xfrm>
           <a:prstGeom prst="rect">
             <a:avLst/>
@@ -4470,33 +4888,69 @@
             <a:pPr>
               <a:defRPr sz="2400" b="1">
                 <a:solidFill>
-                  <a:srgbClr val="202D3F"/>
+                  <a:srgbClr val="1F2B3D"/>
                 </a:solidFill>
                 <a:latin typeface="Aptos Display"/>
               </a:defRPr>
             </a:pPr>
             <a:r>
-              <a:t>Why 24 Departments?</a:t>
-            </a:r>
-          </a:p>
-        </p:txBody>
-      </p:sp>
-      <p:sp>
-        <p:nvSpPr>
-          <p:cNvPr id="3" name="Rectangle 2"/>
-          <p:cNvSpPr/>
+              <a:t>데이터와 표본</a:t>
+            </a:r>
+          </a:p>
+        </p:txBody>
+      </p:sp>
+      <p:sp>
+        <p:nvSpPr>
+          <p:cNvPr id="3" name="TextBox 2"/>
+          <p:cNvSpPr txBox="1"/>
           <p:nvPr/>
         </p:nvSpPr>
         <p:spPr>
           <a:xfrm>
-            <a:off x="502920" y="804672"/>
-            <a:ext cx="1051560" cy="54864"/>
+            <a:off x="530352" y="685800"/>
+            <a:ext cx="8961120" cy="256032"/>
           </a:xfrm>
           <a:prstGeom prst="rect">
             <a:avLst/>
           </a:prstGeom>
+          <a:noFill/>
+        </p:spPr>
+        <p:txBody>
+          <a:bodyPr wrap="none">
+            <a:spAutoFit/>
+          </a:bodyPr>
+          <a:lstStyle/>
+          <a:p>
+            <a:pPr>
+              <a:defRPr sz="1100">
+                <a:solidFill>
+                  <a:srgbClr val="616A74"/>
+                </a:solidFill>
+                <a:latin typeface="Aptos"/>
+              </a:defRPr>
+            </a:pPr>
+            <a:r>
+              <a:t>25개 학과 · 학과×과목 행렬 · binary 인코딩</a:t>
+            </a:r>
+          </a:p>
+        </p:txBody>
+      </p:sp>
+      <p:sp>
+        <p:nvSpPr>
+          <p:cNvPr id="4" name="Rounded Rectangle 3"/>
+          <p:cNvSpPr/>
+          <p:nvPr/>
+        </p:nvSpPr>
+        <p:spPr>
+          <a:xfrm>
+            <a:off x="10698480" y="292608"/>
+            <a:ext cx="960120" cy="347472"/>
+          </a:xfrm>
+          <a:prstGeom prst="roundRect">
+            <a:avLst/>
+          </a:prstGeom>
           <a:solidFill>
-            <a:srgbClr val="278E89"/>
+            <a:srgbClr val="1F2B3D"/>
           </a:solidFill>
           <a:ln>
             <a:noFill/>
@@ -4520,20 +4974,30 @@
           <a:bodyPr rtlCol="0" anchor="ctr"/>
           <a:lstStyle/>
           <a:p>
-            <a:pPr algn="ctr"/>
-          </a:p>
-        </p:txBody>
-      </p:sp>
-      <p:sp>
-        <p:nvSpPr>
-          <p:cNvPr id="4" name="TextBox 3"/>
+            <a:pPr algn="ctr">
+              <a:defRPr sz="1000" b="1">
+                <a:solidFill>
+                  <a:srgbClr val="FFFFFF"/>
+                </a:solidFill>
+                <a:latin typeface="Aptos"/>
+              </a:defRPr>
+            </a:pPr>
+            <a:r>
+              <a:t>2 / 5</a:t>
+            </a:r>
+          </a:p>
+        </p:txBody>
+      </p:sp>
+      <p:sp>
+        <p:nvSpPr>
+          <p:cNvPr id="5" name="TextBox 4"/>
           <p:cNvSpPr txBox="1"/>
           <p:nvPr/>
         </p:nvSpPr>
         <p:spPr>
           <a:xfrm>
-            <a:off x="777240" y="1234440"/>
-            <a:ext cx="4983480" cy="2880360"/>
+            <a:off x="502920" y="6446520"/>
+            <a:ext cx="11155680" cy="228600"/>
           </a:xfrm>
           <a:prstGeom prst="rect">
             <a:avLst/>
@@ -4541,102 +5005,88 @@
           <a:noFill/>
         </p:spPr>
         <p:txBody>
-          <a:bodyPr wrap="square">
-            <a:normAutofit/>
+          <a:bodyPr wrap="none">
+            <a:spAutoFit/>
           </a:bodyPr>
           <a:lstStyle/>
           <a:p>
             <a:pPr>
-              <a:spcAft>
-                <a:spcPts val="700"/>
-              </a:spcAft>
-              <a:defRPr sz="1700">
-                <a:solidFill>
-                  <a:srgbClr val="262A30"/>
+              <a:defRPr sz="800">
+                <a:solidFill>
+                  <a:srgbClr val="616A74"/>
                 </a:solidFill>
                 <a:latin typeface="Aptos"/>
               </a:defRPr>
             </a:pPr>
             <a:r>
-              <a:t>The 24 departments are a purposive sample, not a statistically representative sample</a:t>
-            </a:r>
-          </a:p>
-          <a:p>
-            <a:pPr>
-              <a:spcAft>
-                <a:spcPts val="700"/>
-              </a:spcAft>
-              <a:defRPr sz="1700">
-                <a:solidFill>
-                  <a:srgbClr val="262A30"/>
+              <a:t>NOVA50301 AI Toolkit · Progress Meeting · 2/5</a:t>
+            </a:r>
+          </a:p>
+        </p:txBody>
+      </p:sp>
+      <p:sp>
+        <p:nvSpPr>
+          <p:cNvPr id="6" name="Rounded Rectangle 5"/>
+          <p:cNvSpPr/>
+          <p:nvPr/>
+        </p:nvSpPr>
+        <p:spPr>
+          <a:xfrm>
+            <a:off x="658368" y="1170432"/>
+            <a:ext cx="1737360" cy="292608"/>
+          </a:xfrm>
+          <a:prstGeom prst="roundRect">
+            <a:avLst/>
+          </a:prstGeom>
+          <a:solidFill>
+            <a:srgbClr val="208782"/>
+          </a:solidFill>
+          <a:ln>
+            <a:noFill/>
+          </a:ln>
+        </p:spPr>
+        <p:style>
+          <a:lnRef idx="1">
+            <a:schemeClr val="accent1"/>
+          </a:lnRef>
+          <a:fillRef idx="3">
+            <a:schemeClr val="accent1"/>
+          </a:fillRef>
+          <a:effectRef idx="2">
+            <a:schemeClr val="accent1"/>
+          </a:effectRef>
+          <a:fontRef idx="minor">
+            <a:schemeClr val="lt1"/>
+          </a:fontRef>
+        </p:style>
+        <p:txBody>
+          <a:bodyPr rtlCol="0" anchor="ctr"/>
+          <a:lstStyle/>
+          <a:p>
+            <a:pPr algn="ctr">
+              <a:defRPr sz="1000" b="1">
+                <a:solidFill>
+                  <a:srgbClr val="FFFFFF"/>
                 </a:solidFill>
                 <a:latin typeface="Aptos"/>
               </a:defRPr>
             </a:pPr>
             <a:r>
-              <a:t>Departments were selected to maximize course-profile diversity</a:t>
-            </a:r>
-          </a:p>
-          <a:p>
-            <a:pPr>
-              <a:spcAft>
-                <a:spcPts val="700"/>
-              </a:spcAft>
-              <a:defRPr sz="1700">
-                <a:solidFill>
-                  <a:srgbClr val="262A30"/>
-                </a:solidFill>
-                <a:latin typeface="Aptos"/>
-              </a:defRPr>
-            </a:pPr>
-            <a:r>
-              <a:t>Counseling relevance was considered to reflect realistic admission guidance contexts</a:t>
-            </a:r>
-          </a:p>
-          <a:p>
-            <a:pPr>
-              <a:spcAft>
-                <a:spcPts val="700"/>
-              </a:spcAft>
-              <a:defRPr sz="1700">
-                <a:solidFill>
-                  <a:srgbClr val="262A30"/>
-                </a:solidFill>
-                <a:latin typeface="Aptos"/>
-              </a:defRPr>
-            </a:pPr>
-            <a:r>
-              <a:t>Interpretability was prioritized for a short exploratory clustering study</a:t>
-            </a:r>
-          </a:p>
-          <a:p>
-            <a:pPr>
-              <a:spcAft>
-                <a:spcPts val="700"/>
-              </a:spcAft>
-              <a:defRPr sz="1700">
-                <a:solidFill>
-                  <a:srgbClr val="262A30"/>
-                </a:solidFill>
-                <a:latin typeface="Aptos"/>
-              </a:defRPr>
-            </a:pPr>
-            <a:r>
-              <a:t>The sample size was chosen to keep the analysis manageable and explainable</a:t>
-            </a:r>
-          </a:p>
-        </p:txBody>
-      </p:sp>
-      <p:sp>
-        <p:nvSpPr>
-          <p:cNvPr id="5" name="TextBox 4"/>
+              <a:t>학과 × 권장과목 행렬</a:t>
+            </a:r>
+          </a:p>
+        </p:txBody>
+      </p:sp>
+      <p:sp>
+        <p:nvSpPr>
+          <p:cNvPr id="7" name="TextBox 6"/>
           <p:cNvSpPr txBox="1"/>
           <p:nvPr/>
         </p:nvSpPr>
         <p:spPr>
           <a:xfrm>
-            <a:off x="502920" y="6446520"/>
-            <a:ext cx="11064240" cy="201168"/>
+            <a:off x="658368" y="1627632"/>
+            <a:ext cx="5394960" cy="1417320"/>
           </a:xfrm>
           <a:prstGeom prst="rect">
             <a:avLst/>
@@ -4644,36 +5094,87 @@
           <a:noFill/>
         </p:spPr>
         <p:txBody>
-          <a:bodyPr wrap="none">
-            <a:spAutoFit/>
+          <a:bodyPr wrap="square">
+            <a:normAutofit/>
           </a:bodyPr>
           <a:lstStyle/>
           <a:p>
             <a:pPr>
-              <a:defRPr sz="800">
-                <a:solidFill>
-                  <a:srgbClr val="636C76"/>
+              <a:spcAft>
+                <a:spcPts val="500"/>
+              </a:spcAft>
+              <a:defRPr sz="1200">
+                <a:solidFill>
+                  <a:srgbClr val="272B32"/>
                 </a:solidFill>
                 <a:latin typeface="Aptos"/>
               </a:defRPr>
             </a:pPr>
             <a:r>
-              <a:t>NOVA50301 AI Toolkit Progress Meeting | 2/5</a:t>
+              <a:t>원자료: 학과 과목 선택 가이드.xlsx</a:t>
+            </a:r>
+          </a:p>
+          <a:p>
+            <a:pPr>
+              <a:spcAft>
+                <a:spcPts val="500"/>
+              </a:spcAft>
+              <a:defRPr sz="1200">
+                <a:solidFill>
+                  <a:srgbClr val="272B32"/>
+                </a:solidFill>
+                <a:latin typeface="Aptos"/>
+              </a:defRPr>
+            </a:pPr>
+            <a:r>
+              <a:t>A열 학과명 · B-D열 일반선택/진로선택/융합선택</a:t>
+            </a:r>
+          </a:p>
+          <a:p>
+            <a:pPr>
+              <a:spcAft>
+                <a:spcPts val="500"/>
+              </a:spcAft>
+              <a:defRPr sz="1200">
+                <a:solidFill>
+                  <a:srgbClr val="272B32"/>
+                </a:solidFill>
+                <a:latin typeface="Aptos"/>
+              </a:defRPr>
+            </a:pPr>
+            <a:r>
+              <a:t>1 = 가이드에 제시됨 · 0 = 제시되지 않음</a:t>
+            </a:r>
+          </a:p>
+          <a:p>
+            <a:pPr>
+              <a:spcAft>
+                <a:spcPts val="500"/>
+              </a:spcAft>
+              <a:defRPr sz="1200">
+                <a:solidFill>
+                  <a:srgbClr val="272B32"/>
+                </a:solidFill>
+                <a:latin typeface="Aptos"/>
+              </a:defRPr>
+            </a:pPr>
+            <a:r>
+              <a:t>metadata columns는 clustering feature에서 제외</a:t>
             </a:r>
           </a:p>
         </p:txBody>
       </p:sp>
       <p:graphicFrame>
         <p:nvGraphicFramePr>
-          <p:cNvPr id="6" name="Table 5"/>
+          <p:cNvPr id="8" name="Table 7"/>
           <p:cNvGraphicFramePr>
             <a:graphicFrameLocks noGrp="1"/>
           </p:cNvGraphicFramePr>
           <p:nvPr/>
         </p:nvGraphicFramePr>
         <p:xfrm>
-          <a:off x="777240" y="3977639"/>
-          <a:ext cx="10607040" cy="1417320"/>
+          <a:off x="658368" y="3429000"/>
+          <a:ext cx="5715000" cy="1389888"/>
         </p:xfrm>
         <a:graphic>
           <a:graphicData uri="http://schemas.openxmlformats.org/drawingml/2006/table">
@@ -4682,31 +5183,35 @@
                 <a:tableStyleId>{5C22544A-7EE6-4342-B048-85BDC9FD1C3A}</a:tableStyleId>
               </a:tblPr>
               <a:tblGrid>
-                <a:gridCol w="2743200"/>
-                <a:gridCol w="3840480"/>
-                <a:gridCol w="4023360"/>
+                <a:gridCol w="1600200"/>
+                <a:gridCol w="822960"/>
+                <a:gridCol w="822960"/>
+                <a:gridCol w="822960"/>
+                <a:gridCol w="868680"/>
+                <a:gridCol w="777240"/>
               </a:tblGrid>
-              <a:tr h="354330">
+              <a:tr h="347472">
                 <a:tc>
                   <a:txBody>
                     <a:bodyPr/>
                     <a:lstStyle/>
                     <a:p>
                       <a:pPr>
-                        <a:defRPr b="1" sz="1000">
+                        <a:defRPr sz="830" b="1">
                           <a:solidFill>
                             <a:srgbClr val="FFFFFF"/>
                           </a:solidFill>
+                          <a:latin typeface="Aptos"/>
                         </a:defRPr>
                       </a:pPr>
                       <a:r>
-                        <a:t>Selection Criterion</a:t>
+                        <a:t>department</a:t>
                       </a:r>
                     </a:p>
                   </a:txBody>
                   <a:tcPr>
                     <a:solidFill>
-                      <a:srgbClr val="202D3F"/>
+                      <a:srgbClr val="1F2B3D"/>
                     </a:solidFill>
                   </a:tcPr>
                 </a:tc>
@@ -4716,20 +5221,21 @@
                     <a:lstStyle/>
                     <a:p>
                       <a:pPr>
-                        <a:defRPr b="1" sz="1000">
+                        <a:defRPr sz="830" b="1">
                           <a:solidFill>
                             <a:srgbClr val="FFFFFF"/>
                           </a:solidFill>
+                          <a:latin typeface="Aptos"/>
                         </a:defRPr>
                       </a:pPr>
                       <a:r>
-                        <a:t>Meaning</a:t>
+                        <a:t>미적분Ⅰ</a:t>
                       </a:r>
                     </a:p>
                   </a:txBody>
                   <a:tcPr>
                     <a:solidFill>
-                      <a:srgbClr val="202D3F"/>
+                      <a:srgbClr val="1F2B3D"/>
                     </a:solidFill>
                   </a:tcPr>
                 </a:tc>
@@ -4739,39 +5245,113 @@
                     <a:lstStyle/>
                     <a:p>
                       <a:pPr>
-                        <a:defRPr b="1" sz="1000">
+                        <a:defRPr sz="830" b="1">
                           <a:solidFill>
                             <a:srgbClr val="FFFFFF"/>
                           </a:solidFill>
+                          <a:latin typeface="Aptos"/>
                         </a:defRPr>
                       </a:pPr>
                       <a:r>
-                        <a:t>Role in Project</a:t>
+                        <a:t>물리학</a:t>
                       </a:r>
                     </a:p>
                   </a:txBody>
                   <a:tcPr>
                     <a:solidFill>
-                      <a:srgbClr val="202D3F"/>
+                      <a:srgbClr val="1F2B3D"/>
                     </a:solidFill>
                   </a:tcPr>
                 </a:tc>
-              </a:tr>
-              <a:tr h="354330">
                 <a:tc>
                   <a:txBody>
                     <a:bodyPr/>
                     <a:lstStyle/>
                     <a:p>
                       <a:pPr>
-                        <a:defRPr sz="900">
+                        <a:defRPr sz="830" b="1">
                           <a:solidFill>
-                            <a:srgbClr val="262A30"/>
+                            <a:srgbClr val="FFFFFF"/>
                           </a:solidFill>
+                          <a:latin typeface="Aptos"/>
                         </a:defRPr>
                       </a:pPr>
                       <a:r>
-                        <a:t>Course-profile diversity</a:t>
+                        <a:t>화학</a:t>
+                      </a:r>
+                    </a:p>
+                  </a:txBody>
+                  <a:tcPr>
+                    <a:solidFill>
+                      <a:srgbClr val="1F2B3D"/>
+                    </a:solidFill>
+                  </a:tcPr>
+                </a:tc>
+                <a:tc>
+                  <a:txBody>
+                    <a:bodyPr/>
+                    <a:lstStyle/>
+                    <a:p>
+                      <a:pPr>
+                        <a:defRPr sz="830" b="1">
+                          <a:solidFill>
+                            <a:srgbClr val="FFFFFF"/>
+                          </a:solidFill>
+                          <a:latin typeface="Aptos"/>
+                        </a:defRPr>
+                      </a:pPr>
+                      <a:r>
+                        <a:t>생명과학</a:t>
+                      </a:r>
+                    </a:p>
+                  </a:txBody>
+                  <a:tcPr>
+                    <a:solidFill>
+                      <a:srgbClr val="1F2B3D"/>
+                    </a:solidFill>
+                  </a:tcPr>
+                </a:tc>
+                <a:tc>
+                  <a:txBody>
+                    <a:bodyPr/>
+                    <a:lstStyle/>
+                    <a:p>
+                      <a:pPr>
+                        <a:defRPr sz="830" b="1">
+                          <a:solidFill>
+                            <a:srgbClr val="FFFFFF"/>
+                          </a:solidFill>
+                          <a:latin typeface="Aptos"/>
+                        </a:defRPr>
+                      </a:pPr>
+                      <a:r>
+                        <a:t>경제</a:t>
+                      </a:r>
+                    </a:p>
+                  </a:txBody>
+                  <a:tcPr>
+                    <a:solidFill>
+                      <a:srgbClr val="1F2B3D"/>
+                    </a:solidFill>
+                  </a:tcPr>
+                </a:tc>
+              </a:tr>
+              <a:tr h="347472">
+                <a:tc>
+                  <a:txBody>
+                    <a:bodyPr/>
+                    <a:lstStyle/>
+                    <a:p>
+                      <a:pPr>
+                        <a:defRPr sz="830">
+                          <a:solidFill>
+                            <a:srgbClr val="272B32"/>
+                          </a:solidFill>
+                          <a:latin typeface="Aptos"/>
+                        </a:defRPr>
+                      </a:pPr>
+                      <a:r>
+                        <a:t>기계공학과</a:t>
                       </a:r>
                     </a:p>
                   </a:txBody>
@@ -4783,14 +5363,133 @@
                     <a:lstStyle/>
                     <a:p>
                       <a:pPr>
-                        <a:defRPr sz="900">
+                        <a:defRPr sz="830">
                           <a:solidFill>
-                            <a:srgbClr val="262A30"/>
+                            <a:srgbClr val="272B32"/>
                           </a:solidFill>
+                          <a:latin typeface="Aptos"/>
                         </a:defRPr>
                       </a:pPr>
                       <a:r>
-                        <a:t>Include contrasting course patterns</a:t>
+                        <a:t>1</a:t>
+                      </a:r>
+                    </a:p>
+                  </a:txBody>
+                  <a:tcPr>
+                    <a:solidFill>
+                      <a:srgbClr val="E0F2EE"/>
+                    </a:solidFill>
+                  </a:tcPr>
+                </a:tc>
+                <a:tc>
+                  <a:txBody>
+                    <a:bodyPr/>
+                    <a:lstStyle/>
+                    <a:p>
+                      <a:pPr>
+                        <a:defRPr sz="830">
+                          <a:solidFill>
+                            <a:srgbClr val="272B32"/>
+                          </a:solidFill>
+                          <a:latin typeface="Aptos"/>
+                        </a:defRPr>
+                      </a:pPr>
+                      <a:r>
+                        <a:t>1</a:t>
+                      </a:r>
+                    </a:p>
+                  </a:txBody>
+                  <a:tcPr>
+                    <a:solidFill>
+                      <a:srgbClr val="E0F2EE"/>
+                    </a:solidFill>
+                  </a:tcPr>
+                </a:tc>
+                <a:tc>
+                  <a:txBody>
+                    <a:bodyPr/>
+                    <a:lstStyle/>
+                    <a:p>
+                      <a:pPr>
+                        <a:defRPr sz="830">
+                          <a:solidFill>
+                            <a:srgbClr val="272B32"/>
+                          </a:solidFill>
+                          <a:latin typeface="Aptos"/>
+                        </a:defRPr>
+                      </a:pPr>
+                      <a:r>
+                        <a:t>1</a:t>
+                      </a:r>
+                    </a:p>
+                  </a:txBody>
+                  <a:tcPr>
+                    <a:solidFill>
+                      <a:srgbClr val="E0F2EE"/>
+                    </a:solidFill>
+                  </a:tcPr>
+                </a:tc>
+                <a:tc>
+                  <a:txBody>
+                    <a:bodyPr/>
+                    <a:lstStyle/>
+                    <a:p>
+                      <a:pPr>
+                        <a:defRPr sz="830">
+                          <a:solidFill>
+                            <a:srgbClr val="272B32"/>
+                          </a:solidFill>
+                          <a:latin typeface="Aptos"/>
+                        </a:defRPr>
+                      </a:pPr>
+                      <a:r>
+                        <a:t>1</a:t>
+                      </a:r>
+                    </a:p>
+                  </a:txBody>
+                  <a:tcPr>
+                    <a:solidFill>
+                      <a:srgbClr val="E0F2EE"/>
+                    </a:solidFill>
+                  </a:tcPr>
+                </a:tc>
+                <a:tc>
+                  <a:txBody>
+                    <a:bodyPr/>
+                    <a:lstStyle/>
+                    <a:p>
+                      <a:pPr>
+                        <a:defRPr sz="830">
+                          <a:solidFill>
+                            <a:srgbClr val="272B32"/>
+                          </a:solidFill>
+                          <a:latin typeface="Aptos"/>
+                        </a:defRPr>
+                      </a:pPr>
+                      <a:r>
+                        <a:t>0</a:t>
+                      </a:r>
+                    </a:p>
+                  </a:txBody>
+                  <a:tcPr/>
+                </a:tc>
+              </a:tr>
+              <a:tr h="347472">
+                <a:tc>
+                  <a:txBody>
+                    <a:bodyPr/>
+                    <a:lstStyle/>
+                    <a:p>
+                      <a:pPr>
+                        <a:defRPr sz="830">
+                          <a:solidFill>
+                            <a:srgbClr val="272B32"/>
+                          </a:solidFill>
+                          <a:latin typeface="Aptos"/>
+                        </a:defRPr>
+                      </a:pPr>
+                      <a:r>
+                        <a:t>자동차공학과</a:t>
                       </a:r>
                     </a:p>
                   </a:txBody>
@@ -4802,35 +5501,87 @@
                     <a:lstStyle/>
                     <a:p>
                       <a:pPr>
-                        <a:defRPr sz="900">
+                        <a:defRPr sz="830">
                           <a:solidFill>
-                            <a:srgbClr val="262A30"/>
+                            <a:srgbClr val="272B32"/>
                           </a:solidFill>
+                          <a:latin typeface="Aptos"/>
                         </a:defRPr>
                       </a:pPr>
                       <a:r>
-                        <a:t>Improve clustering signal</a:t>
+                        <a:t>1</a:t>
                       </a:r>
                     </a:p>
                   </a:txBody>
-                  <a:tcPr/>
+                  <a:tcPr>
+                    <a:solidFill>
+                      <a:srgbClr val="E0F2EE"/>
+                    </a:solidFill>
+                  </a:tcPr>
                 </a:tc>
-              </a:tr>
-              <a:tr h="354330">
                 <a:tc>
                   <a:txBody>
                     <a:bodyPr/>
                     <a:lstStyle/>
                     <a:p>
                       <a:pPr>
-                        <a:defRPr sz="900">
+                        <a:defRPr sz="830">
                           <a:solidFill>
-                            <a:srgbClr val="262A30"/>
+                            <a:srgbClr val="272B32"/>
                           </a:solidFill>
+                          <a:latin typeface="Aptos"/>
                         </a:defRPr>
                       </a:pPr>
                       <a:r>
-                        <a:t>Counseling relevance</a:t>
+                        <a:t>1</a:t>
+                      </a:r>
+                    </a:p>
+                  </a:txBody>
+                  <a:tcPr>
+                    <a:solidFill>
+                      <a:srgbClr val="E0F2EE"/>
+                    </a:solidFill>
+                  </a:tcPr>
+                </a:tc>
+                <a:tc>
+                  <a:txBody>
+                    <a:bodyPr/>
+                    <a:lstStyle/>
+                    <a:p>
+                      <a:pPr>
+                        <a:defRPr sz="830">
+                          <a:solidFill>
+                            <a:srgbClr val="272B32"/>
+                          </a:solidFill>
+                          <a:latin typeface="Aptos"/>
+                        </a:defRPr>
+                      </a:pPr>
+                      <a:r>
+                        <a:t>1</a:t>
+                      </a:r>
+                    </a:p>
+                  </a:txBody>
+                  <a:tcPr>
+                    <a:solidFill>
+                      <a:srgbClr val="E0F2EE"/>
+                    </a:solidFill>
+                  </a:tcPr>
+                </a:tc>
+                <a:tc>
+                  <a:txBody>
+                    <a:bodyPr/>
+                    <a:lstStyle/>
+                    <a:p>
+                      <a:pPr>
+                        <a:defRPr sz="830">
+                          <a:solidFill>
+                            <a:srgbClr val="272B32"/>
+                          </a:solidFill>
+                          <a:latin typeface="Aptos"/>
+                        </a:defRPr>
+                      </a:pPr>
+                      <a:r>
+                        <a:t>0</a:t>
                       </a:r>
                     </a:p>
                   </a:txBody>
@@ -4842,14 +5593,37 @@
                     <a:lstStyle/>
                     <a:p>
                       <a:pPr>
-                        <a:defRPr sz="900">
+                        <a:defRPr sz="830">
                           <a:solidFill>
-                            <a:srgbClr val="262A30"/>
+                            <a:srgbClr val="272B32"/>
                           </a:solidFill>
+                          <a:latin typeface="Aptos"/>
                         </a:defRPr>
                       </a:pPr>
                       <a:r>
-                        <a:t>Reflect realistic guidance contexts</a:t>
+                        <a:t>0</a:t>
+                      </a:r>
+                    </a:p>
+                  </a:txBody>
+                  <a:tcPr/>
+                </a:tc>
+              </a:tr>
+              <a:tr h="347472">
+                <a:tc>
+                  <a:txBody>
+                    <a:bodyPr/>
+                    <a:lstStyle/>
+                    <a:p>
+                      <a:pPr>
+                        <a:defRPr sz="830">
+                          <a:solidFill>
+                            <a:srgbClr val="272B32"/>
+                          </a:solidFill>
+                          <a:latin typeface="Aptos"/>
+                        </a:defRPr>
+                      </a:pPr>
+                      <a:r>
+                        <a:t>경제학과</a:t>
                       </a:r>
                     </a:p>
                   </a:txBody>
@@ -4861,35 +5635,39 @@
                     <a:lstStyle/>
                     <a:p>
                       <a:pPr>
-                        <a:defRPr sz="900">
+                        <a:defRPr sz="830">
                           <a:solidFill>
-                            <a:srgbClr val="262A30"/>
+                            <a:srgbClr val="272B32"/>
                           </a:solidFill>
+                          <a:latin typeface="Aptos"/>
                         </a:defRPr>
                       </a:pPr>
                       <a:r>
-                        <a:t>Support admission counseling use</a:t>
+                        <a:t>1</a:t>
                       </a:r>
                     </a:p>
                   </a:txBody>
-                  <a:tcPr/>
+                  <a:tcPr>
+                    <a:solidFill>
+                      <a:srgbClr val="E0F2EE"/>
+                    </a:solidFill>
+                  </a:tcPr>
                 </a:tc>
-              </a:tr>
-              <a:tr h="354330">
                 <a:tc>
                   <a:txBody>
                     <a:bodyPr/>
                     <a:lstStyle/>
                     <a:p>
                       <a:pPr>
-                        <a:defRPr sz="900">
+                        <a:defRPr sz="830">
                           <a:solidFill>
-                            <a:srgbClr val="262A30"/>
+                            <a:srgbClr val="272B32"/>
                           </a:solidFill>
+                          <a:latin typeface="Aptos"/>
                         </a:defRPr>
                       </a:pPr>
                       <a:r>
-                        <a:t>Interpretability</a:t>
+                        <a:t>0</a:t>
                       </a:r>
                     </a:p>
                   </a:txBody>
@@ -4901,14 +5679,15 @@
                     <a:lstStyle/>
                     <a:p>
                       <a:pPr>
-                        <a:defRPr sz="900">
+                        <a:defRPr sz="830">
                           <a:solidFill>
-                            <a:srgbClr val="262A30"/>
+                            <a:srgbClr val="272B32"/>
                           </a:solidFill>
+                          <a:latin typeface="Aptos"/>
                         </a:defRPr>
                       </a:pPr>
                       <a:r>
-                        <a:t>Keep sample explainable</a:t>
+                        <a:t>0</a:t>
                       </a:r>
                     </a:p>
                   </a:txBody>
@@ -4920,18 +5699,43 @@
                     <a:lstStyle/>
                     <a:p>
                       <a:pPr>
-                        <a:defRPr sz="900">
+                        <a:defRPr sz="830">
                           <a:solidFill>
-                            <a:srgbClr val="262A30"/>
+                            <a:srgbClr val="272B32"/>
                           </a:solidFill>
+                          <a:latin typeface="Aptos"/>
                         </a:defRPr>
                       </a:pPr>
                       <a:r>
-                        <a:t>Fit a short exploratory study</a:t>
+                        <a:t>0</a:t>
                       </a:r>
                     </a:p>
                   </a:txBody>
                   <a:tcPr/>
+                </a:tc>
+                <a:tc>
+                  <a:txBody>
+                    <a:bodyPr/>
+                    <a:lstStyle/>
+                    <a:p>
+                      <a:pPr>
+                        <a:defRPr sz="830">
+                          <a:solidFill>
+                            <a:srgbClr val="272B32"/>
+                          </a:solidFill>
+                          <a:latin typeface="Aptos"/>
+                        </a:defRPr>
+                      </a:pPr>
+                      <a:r>
+                        <a:t>1</a:t>
+                      </a:r>
+                    </a:p>
+                  </a:txBody>
+                  <a:tcPr>
+                    <a:solidFill>
+                      <a:srgbClr val="E0F2EE"/>
+                    </a:solidFill>
+                  </a:tcPr>
                 </a:tc>
               </a:tr>
             </a:tbl>
@@ -4940,36 +5744,345 @@
       </p:graphicFrame>
       <p:sp>
         <p:nvSpPr>
-          <p:cNvPr id="7" name="TextBox 6"/>
-          <p:cNvSpPr txBox="1"/>
+          <p:cNvPr id="9" name="Rounded Rectangle 8"/>
+          <p:cNvSpPr/>
           <p:nvPr/>
         </p:nvSpPr>
         <p:spPr>
           <a:xfrm>
-            <a:off x="777240" y="5532120"/>
-            <a:ext cx="8961120" cy="228600"/>
-          </a:xfrm>
-          <a:prstGeom prst="rect">
+            <a:off x="6720840" y="1170432"/>
+            <a:ext cx="1600200" cy="292608"/>
+          </a:xfrm>
+          <a:prstGeom prst="roundRect">
             <a:avLst/>
           </a:prstGeom>
-          <a:noFill/>
-        </p:spPr>
-        <p:txBody>
-          <a:bodyPr wrap="square">
-            <a:spAutoFit/>
+          <a:solidFill>
+            <a:srgbClr val="1F2B3D"/>
+          </a:solidFill>
+          <a:ln>
+            <a:noFill/>
+          </a:ln>
+        </p:spPr>
+        <p:style>
+          <a:lnRef idx="1">
+            <a:schemeClr val="accent1"/>
+          </a:lnRef>
+          <a:fillRef idx="3">
+            <a:schemeClr val="accent1"/>
+          </a:fillRef>
+          <a:effectRef idx="2">
+            <a:schemeClr val="accent1"/>
+          </a:effectRef>
+          <a:fontRef idx="minor">
+            <a:schemeClr val="lt1"/>
+          </a:fontRef>
+        </p:style>
+        <p:txBody>
+          <a:bodyPr rtlCol="0" anchor="ctr"/>
+          <a:lstStyle/>
+          <a:p>
+            <a:pPr algn="ctr">
+              <a:defRPr sz="1000" b="1">
+                <a:solidFill>
+                  <a:srgbClr val="FFFFFF"/>
+                </a:solidFill>
+                <a:latin typeface="Aptos"/>
+              </a:defRPr>
+            </a:pPr>
+            <a:r>
+              <a:t>25개 학과 선정 근거</a:t>
+            </a:r>
+          </a:p>
+        </p:txBody>
+      </p:sp>
+      <p:sp>
+        <p:nvSpPr>
+          <p:cNvPr id="10" name="Rounded Rectangle 9"/>
+          <p:cNvSpPr/>
+          <p:nvPr/>
+        </p:nvSpPr>
+        <p:spPr>
+          <a:xfrm>
+            <a:off x="6720840" y="1627632"/>
+            <a:ext cx="4480560" cy="658368"/>
+          </a:xfrm>
+          <a:prstGeom prst="roundRect">
+            <a:avLst/>
+          </a:prstGeom>
+          <a:solidFill>
+            <a:srgbClr val="E0F2EE"/>
+          </a:solidFill>
+          <a:ln>
+            <a:solidFill>
+              <a:srgbClr val="D6DBE1"/>
+            </a:solidFill>
+          </a:ln>
+        </p:spPr>
+        <p:style>
+          <a:lnRef idx="1">
+            <a:schemeClr val="accent1"/>
+          </a:lnRef>
+          <a:fillRef idx="3">
+            <a:schemeClr val="accent1"/>
+          </a:fillRef>
+          <a:effectRef idx="2">
+            <a:schemeClr val="accent1"/>
+          </a:effectRef>
+          <a:fontRef idx="minor">
+            <a:schemeClr val="lt1"/>
+          </a:fontRef>
+        </p:style>
+        <p:txBody>
+          <a:bodyPr rtlCol="0" anchor="ctr" wrap="square">
+            <a:normAutofit/>
           </a:bodyPr>
           <a:lstStyle/>
+          <a:p>
+            <a:pPr algn="ctr">
+              <a:spcAft>
+                <a:spcPts val="400"/>
+              </a:spcAft>
+              <a:defRPr sz="1100" b="1">
+                <a:solidFill>
+                  <a:srgbClr val="1F2B3D"/>
+                </a:solidFill>
+                <a:latin typeface="Aptos"/>
+              </a:defRPr>
+            </a:pPr>
+            <a:r>
+              <a:t>목적 표본</a:t>
+            </a:r>
+          </a:p>
           <a:p>
             <a:pPr>
               <a:defRPr sz="1000">
                 <a:solidFill>
-                  <a:srgbClr val="636C76"/>
+                  <a:srgbClr val="272B32"/>
                 </a:solidFill>
                 <a:latin typeface="Aptos"/>
               </a:defRPr>
             </a:pPr>
             <a:r>
-              <a:t>Recommended table: rationale for purposive department selection</a:t>
+              <a:t>통계적 대표 표본이 아니라 exploratory purposive sample</a:t>
+            </a:r>
+          </a:p>
+        </p:txBody>
+      </p:sp>
+      <p:sp>
+        <p:nvSpPr>
+          <p:cNvPr id="11" name="Rounded Rectangle 10"/>
+          <p:cNvSpPr/>
+          <p:nvPr/>
+        </p:nvSpPr>
+        <p:spPr>
+          <a:xfrm>
+            <a:off x="6720840" y="2450592"/>
+            <a:ext cx="4480560" cy="658368"/>
+          </a:xfrm>
+          <a:prstGeom prst="roundRect">
+            <a:avLst/>
+          </a:prstGeom>
+          <a:solidFill>
+            <a:srgbClr val="F4F6F8"/>
+          </a:solidFill>
+          <a:ln>
+            <a:solidFill>
+              <a:srgbClr val="D6DBE1"/>
+            </a:solidFill>
+          </a:ln>
+        </p:spPr>
+        <p:style>
+          <a:lnRef idx="1">
+            <a:schemeClr val="accent1"/>
+          </a:lnRef>
+          <a:fillRef idx="3">
+            <a:schemeClr val="accent1"/>
+          </a:fillRef>
+          <a:effectRef idx="2">
+            <a:schemeClr val="accent1"/>
+          </a:effectRef>
+          <a:fontRef idx="minor">
+            <a:schemeClr val="lt1"/>
+          </a:fontRef>
+        </p:style>
+        <p:txBody>
+          <a:bodyPr rtlCol="0" anchor="ctr" wrap="square">
+            <a:normAutofit/>
+          </a:bodyPr>
+          <a:lstStyle/>
+          <a:p>
+            <a:pPr algn="ctr">
+              <a:spcAft>
+                <a:spcPts val="400"/>
+              </a:spcAft>
+              <a:defRPr sz="1100" b="1">
+                <a:solidFill>
+                  <a:srgbClr val="1F2B3D"/>
+                </a:solidFill>
+                <a:latin typeface="Aptos"/>
+              </a:defRPr>
+            </a:pPr>
+            <a:r>
+              <a:t>권장과목 다양성</a:t>
+            </a:r>
+          </a:p>
+          <a:p>
+            <a:pPr>
+              <a:defRPr sz="1000">
+                <a:solidFill>
+                  <a:srgbClr val="272B32"/>
+                </a:solidFill>
+                <a:latin typeface="Aptos"/>
+              </a:defRPr>
+            </a:pPr>
+            <a:r>
+              <a:t>인문, 사회, 공학, 자연, 의약/보건, 디자인을 함께 포함</a:t>
+            </a:r>
+          </a:p>
+        </p:txBody>
+      </p:sp>
+      <p:sp>
+        <p:nvSpPr>
+          <p:cNvPr id="12" name="Rounded Rectangle 11"/>
+          <p:cNvSpPr/>
+          <p:nvPr/>
+        </p:nvSpPr>
+        <p:spPr>
+          <a:xfrm>
+            <a:off x="6720840" y="3273552"/>
+            <a:ext cx="4480560" cy="658368"/>
+          </a:xfrm>
+          <a:prstGeom prst="roundRect">
+            <a:avLst/>
+          </a:prstGeom>
+          <a:solidFill>
+            <a:srgbClr val="F9EFDC"/>
+          </a:solidFill>
+          <a:ln>
+            <a:solidFill>
+              <a:srgbClr val="D6DBE1"/>
+            </a:solidFill>
+          </a:ln>
+        </p:spPr>
+        <p:style>
+          <a:lnRef idx="1">
+            <a:schemeClr val="accent1"/>
+          </a:lnRef>
+          <a:fillRef idx="3">
+            <a:schemeClr val="accent1"/>
+          </a:fillRef>
+          <a:effectRef idx="2">
+            <a:schemeClr val="accent1"/>
+          </a:effectRef>
+          <a:fontRef idx="minor">
+            <a:schemeClr val="lt1"/>
+          </a:fontRef>
+        </p:style>
+        <p:txBody>
+          <a:bodyPr rtlCol="0" anchor="ctr" wrap="square">
+            <a:normAutofit/>
+          </a:bodyPr>
+          <a:lstStyle/>
+          <a:p>
+            <a:pPr algn="ctr">
+              <a:spcAft>
+                <a:spcPts val="400"/>
+              </a:spcAft>
+              <a:defRPr sz="1100" b="1">
+                <a:solidFill>
+                  <a:srgbClr val="1F2B3D"/>
+                </a:solidFill>
+                <a:latin typeface="Aptos"/>
+              </a:defRPr>
+            </a:pPr>
+            <a:r>
+              <a:t>울산 산업 boundary case</a:t>
+            </a:r>
+          </a:p>
+          <a:p>
+            <a:pPr>
+              <a:defRPr sz="1000">
+                <a:solidFill>
+                  <a:srgbClr val="272B32"/>
+                </a:solidFill>
+                <a:latin typeface="Aptos"/>
+              </a:defRPr>
+            </a:pPr>
+            <a:r>
+              <a:t>조선해양공학과와 자동차공학과를 applied engineering case로 포함</a:t>
+            </a:r>
+          </a:p>
+        </p:txBody>
+      </p:sp>
+      <p:sp>
+        <p:nvSpPr>
+          <p:cNvPr id="13" name="Rounded Rectangle 12"/>
+          <p:cNvSpPr/>
+          <p:nvPr/>
+        </p:nvSpPr>
+        <p:spPr>
+          <a:xfrm>
+            <a:off x="6720840" y="4096512"/>
+            <a:ext cx="4480560" cy="658368"/>
+          </a:xfrm>
+          <a:prstGeom prst="roundRect">
+            <a:avLst/>
+          </a:prstGeom>
+          <a:solidFill>
+            <a:srgbClr val="F4F6F8"/>
+          </a:solidFill>
+          <a:ln>
+            <a:solidFill>
+              <a:srgbClr val="D6DBE1"/>
+            </a:solidFill>
+          </a:ln>
+        </p:spPr>
+        <p:style>
+          <a:lnRef idx="1">
+            <a:schemeClr val="accent1"/>
+          </a:lnRef>
+          <a:fillRef idx="3">
+            <a:schemeClr val="accent1"/>
+          </a:fillRef>
+          <a:effectRef idx="2">
+            <a:schemeClr val="accent1"/>
+          </a:effectRef>
+          <a:fontRef idx="minor">
+            <a:schemeClr val="lt1"/>
+          </a:fontRef>
+        </p:style>
+        <p:txBody>
+          <a:bodyPr rtlCol="0" anchor="ctr" wrap="square">
+            <a:normAutofit/>
+          </a:bodyPr>
+          <a:lstStyle/>
+          <a:p>
+            <a:pPr algn="ctr">
+              <a:spcAft>
+                <a:spcPts val="400"/>
+              </a:spcAft>
+              <a:defRPr sz="1100" b="1">
+                <a:solidFill>
+                  <a:srgbClr val="1F2B3D"/>
+                </a:solidFill>
+                <a:latin typeface="Aptos"/>
+              </a:defRPr>
+            </a:pPr>
+            <a:r>
+              <a:t>해석 가능성</a:t>
+            </a:r>
+          </a:p>
+          <a:p>
+            <a:pPr>
+              <a:defRPr sz="1000">
+                <a:solidFill>
+                  <a:srgbClr val="272B32"/>
+                </a:solidFill>
+                <a:latin typeface="Aptos"/>
+              </a:defRPr>
+            </a:pPr>
+            <a:r>
+              <a:t>25개 규모로 heatmap과 dendrogram을 직접 해석 가능</a:t>
             </a:r>
           </a:p>
         </p:txBody>
@@ -5009,7 +6122,7 @@
         <p:spPr>
           <a:xfrm>
             <a:off x="502920" y="228600"/>
-            <a:ext cx="11155680" cy="502920"/>
+            <a:ext cx="8961120" cy="411480"/>
           </a:xfrm>
           <a:prstGeom prst="rect">
             <a:avLst/>
@@ -5025,33 +6138,69 @@
             <a:pPr>
               <a:defRPr sz="2400" b="1">
                 <a:solidFill>
-                  <a:srgbClr val="202D3F"/>
+                  <a:srgbClr val="1F2B3D"/>
                 </a:solidFill>
                 <a:latin typeface="Aptos Display"/>
               </a:defRPr>
             </a:pPr>
             <a:r>
-              <a:t>Data Structure</a:t>
-            </a:r>
-          </a:p>
-        </p:txBody>
-      </p:sp>
-      <p:sp>
-        <p:nvSpPr>
-          <p:cNvPr id="3" name="Rectangle 2"/>
-          <p:cNvSpPr/>
+              <a:t>방법과 군집 구조</a:t>
+            </a:r>
+          </a:p>
+        </p:txBody>
+      </p:sp>
+      <p:sp>
+        <p:nvSpPr>
+          <p:cNvPr id="3" name="TextBox 2"/>
+          <p:cNvSpPr txBox="1"/>
           <p:nvPr/>
         </p:nvSpPr>
         <p:spPr>
           <a:xfrm>
-            <a:off x="502920" y="804672"/>
-            <a:ext cx="1051560" cy="54864"/>
+            <a:off x="530352" y="685800"/>
+            <a:ext cx="8961120" cy="256032"/>
           </a:xfrm>
           <a:prstGeom prst="rect">
             <a:avLst/>
           </a:prstGeom>
+          <a:noFill/>
+        </p:spPr>
+        <p:txBody>
+          <a:bodyPr wrap="none">
+            <a:spAutoFit/>
+          </a:bodyPr>
+          <a:lstStyle/>
+          <a:p>
+            <a:pPr>
+              <a:defRPr sz="1100">
+                <a:solidFill>
+                  <a:srgbClr val="616A74"/>
+                </a:solidFill>
+                <a:latin typeface="Aptos"/>
+              </a:defRPr>
+            </a:pPr>
+            <a:r>
+              <a:t>Cosine similarity + Hierarchical clustering</a:t>
+            </a:r>
+          </a:p>
+        </p:txBody>
+      </p:sp>
+      <p:sp>
+        <p:nvSpPr>
+          <p:cNvPr id="4" name="Rounded Rectangle 3"/>
+          <p:cNvSpPr/>
+          <p:nvPr/>
+        </p:nvSpPr>
+        <p:spPr>
+          <a:xfrm>
+            <a:off x="10698480" y="292608"/>
+            <a:ext cx="960120" cy="347472"/>
+          </a:xfrm>
+          <a:prstGeom prst="roundRect">
+            <a:avLst/>
+          </a:prstGeom>
           <a:solidFill>
-            <a:srgbClr val="278E89"/>
+            <a:srgbClr val="1F2B3D"/>
           </a:solidFill>
           <a:ln>
             <a:noFill/>
@@ -5075,20 +6224,30 @@
           <a:bodyPr rtlCol="0" anchor="ctr"/>
           <a:lstStyle/>
           <a:p>
-            <a:pPr algn="ctr"/>
-          </a:p>
-        </p:txBody>
-      </p:sp>
-      <p:sp>
-        <p:nvSpPr>
-          <p:cNvPr id="4" name="TextBox 3"/>
+            <a:pPr algn="ctr">
+              <a:defRPr sz="1000" b="1">
+                <a:solidFill>
+                  <a:srgbClr val="FFFFFF"/>
+                </a:solidFill>
+                <a:latin typeface="Aptos"/>
+              </a:defRPr>
+            </a:pPr>
+            <a:r>
+              <a:t>3 / 5</a:t>
+            </a:r>
+          </a:p>
+        </p:txBody>
+      </p:sp>
+      <p:sp>
+        <p:nvSpPr>
+          <p:cNvPr id="5" name="TextBox 4"/>
           <p:cNvSpPr txBox="1"/>
           <p:nvPr/>
         </p:nvSpPr>
         <p:spPr>
           <a:xfrm>
-            <a:off x="777240" y="1234440"/>
-            <a:ext cx="4983480" cy="2880360"/>
+            <a:off x="502920" y="6446520"/>
+            <a:ext cx="11155680" cy="228600"/>
           </a:xfrm>
           <a:prstGeom prst="rect">
             <a:avLst/>
@@ -5096,102 +6255,331 @@
           <a:noFill/>
         </p:spPr>
         <p:txBody>
-          <a:bodyPr wrap="square">
+          <a:bodyPr wrap="none">
+            <a:spAutoFit/>
+          </a:bodyPr>
+          <a:lstStyle/>
+          <a:p>
+            <a:pPr>
+              <a:defRPr sz="800">
+                <a:solidFill>
+                  <a:srgbClr val="616A74"/>
+                </a:solidFill>
+                <a:latin typeface="Aptos"/>
+              </a:defRPr>
+            </a:pPr>
+            <a:r>
+              <a:t>NOVA50301 AI Toolkit · Progress Meeting · 3/5</a:t>
+            </a:r>
+          </a:p>
+        </p:txBody>
+      </p:sp>
+      <p:sp>
+        <p:nvSpPr>
+          <p:cNvPr id="6" name="Rounded Rectangle 5"/>
+          <p:cNvSpPr/>
+          <p:nvPr/>
+        </p:nvSpPr>
+        <p:spPr>
+          <a:xfrm>
+            <a:off x="594360" y="1115568"/>
+            <a:ext cx="1325880" cy="292608"/>
+          </a:xfrm>
+          <a:prstGeom prst="roundRect">
+            <a:avLst/>
+          </a:prstGeom>
+          <a:solidFill>
+            <a:srgbClr val="208782"/>
+          </a:solidFill>
+          <a:ln>
+            <a:noFill/>
+          </a:ln>
+        </p:spPr>
+        <p:style>
+          <a:lnRef idx="1">
+            <a:schemeClr val="accent1"/>
+          </a:lnRef>
+          <a:fillRef idx="3">
+            <a:schemeClr val="accent1"/>
+          </a:fillRef>
+          <a:effectRef idx="2">
+            <a:schemeClr val="accent1"/>
+          </a:effectRef>
+          <a:fontRef idx="minor">
+            <a:schemeClr val="lt1"/>
+          </a:fontRef>
+        </p:style>
+        <p:txBody>
+          <a:bodyPr rtlCol="0" anchor="ctr"/>
+          <a:lstStyle/>
+          <a:p>
+            <a:pPr algn="ctr">
+              <a:defRPr sz="1000" b="1">
+                <a:solidFill>
+                  <a:srgbClr val="FFFFFF"/>
+                </a:solidFill>
+                <a:latin typeface="Aptos"/>
+              </a:defRPr>
+            </a:pPr>
+            <a:r>
+              <a:t>방법 선택 근거</a:t>
+            </a:r>
+          </a:p>
+        </p:txBody>
+      </p:sp>
+      <p:sp>
+        <p:nvSpPr>
+          <p:cNvPr id="7" name="Rounded Rectangle 6"/>
+          <p:cNvSpPr/>
+          <p:nvPr/>
+        </p:nvSpPr>
+        <p:spPr>
+          <a:xfrm>
+            <a:off x="594360" y="1536192"/>
+            <a:ext cx="4709160" cy="758952"/>
+          </a:xfrm>
+          <a:prstGeom prst="roundRect">
+            <a:avLst/>
+          </a:prstGeom>
+          <a:solidFill>
+            <a:srgbClr val="F4F6F8"/>
+          </a:solidFill>
+          <a:ln>
+            <a:solidFill>
+              <a:srgbClr val="D6DBE1"/>
+            </a:solidFill>
+          </a:ln>
+        </p:spPr>
+        <p:style>
+          <a:lnRef idx="1">
+            <a:schemeClr val="accent1"/>
+          </a:lnRef>
+          <a:fillRef idx="3">
+            <a:schemeClr val="accent1"/>
+          </a:fillRef>
+          <a:effectRef idx="2">
+            <a:schemeClr val="accent1"/>
+          </a:effectRef>
+          <a:fontRef idx="minor">
+            <a:schemeClr val="lt1"/>
+          </a:fontRef>
+        </p:style>
+        <p:txBody>
+          <a:bodyPr rtlCol="0" anchor="ctr" wrap="square">
             <a:normAutofit/>
           </a:bodyPr>
           <a:lstStyle/>
           <a:p>
+            <a:pPr algn="ctr">
+              <a:spcAft>
+                <a:spcPts val="400"/>
+              </a:spcAft>
+              <a:defRPr sz="1100" b="1">
+                <a:solidFill>
+                  <a:srgbClr val="1F2B3D"/>
+                </a:solidFill>
+                <a:latin typeface="Aptos"/>
+              </a:defRPr>
+            </a:pPr>
+            <a:r>
+              <a:t>Cosine similarity</a:t>
+            </a:r>
+          </a:p>
+          <a:p>
             <a:pPr>
+              <a:defRPr sz="1000">
+                <a:solidFill>
+                  <a:srgbClr val="272B32"/>
+                </a:solidFill>
+                <a:latin typeface="Aptos"/>
+              </a:defRPr>
+            </a:pPr>
+            <a:r>
+              <a:t>학과별 과목 수 차이가 있으므로 magnitude보다 course composition을 비교</a:t>
+            </a:r>
+          </a:p>
+        </p:txBody>
+      </p:sp>
+      <p:sp>
+        <p:nvSpPr>
+          <p:cNvPr id="8" name="Rounded Rectangle 7"/>
+          <p:cNvSpPr/>
+          <p:nvPr/>
+        </p:nvSpPr>
+        <p:spPr>
+          <a:xfrm>
+            <a:off x="594360" y="2450592"/>
+            <a:ext cx="4709160" cy="758952"/>
+          </a:xfrm>
+          <a:prstGeom prst="roundRect">
+            <a:avLst/>
+          </a:prstGeom>
+          <a:solidFill>
+            <a:srgbClr val="F4F6F8"/>
+          </a:solidFill>
+          <a:ln>
+            <a:solidFill>
+              <a:srgbClr val="D6DBE1"/>
+            </a:solidFill>
+          </a:ln>
+        </p:spPr>
+        <p:style>
+          <a:lnRef idx="1">
+            <a:schemeClr val="accent1"/>
+          </a:lnRef>
+          <a:fillRef idx="3">
+            <a:schemeClr val="accent1"/>
+          </a:fillRef>
+          <a:effectRef idx="2">
+            <a:schemeClr val="accent1"/>
+          </a:effectRef>
+          <a:fontRef idx="minor">
+            <a:schemeClr val="lt1"/>
+          </a:fontRef>
+        </p:style>
+        <p:txBody>
+          <a:bodyPr rtlCol="0" anchor="ctr" wrap="square">
+            <a:normAutofit/>
+          </a:bodyPr>
+          <a:lstStyle/>
+          <a:p>
+            <a:pPr algn="ctr">
               <a:spcAft>
-                <a:spcPts val="700"/>
+                <a:spcPts val="400"/>
               </a:spcAft>
-              <a:defRPr sz="1700">
-                <a:solidFill>
-                  <a:srgbClr val="262A30"/>
+              <a:defRPr sz="1100" b="1">
+                <a:solidFill>
+                  <a:srgbClr val="1F2B3D"/>
                 </a:solidFill>
                 <a:latin typeface="Aptos"/>
               </a:defRPr>
             </a:pPr>
             <a:r>
-              <a:t>Main dataset: a department-course matrix</a:t>
+              <a:t>Hierarchical clustering</a:t>
             </a:r>
           </a:p>
           <a:p>
             <a:pPr>
+              <a:defRPr sz="1000">
+                <a:solidFill>
+                  <a:srgbClr val="272B32"/>
+                </a:solidFill>
+                <a:latin typeface="Aptos"/>
+              </a:defRPr>
+            </a:pPr>
+            <a:r>
+              <a:t>n=25 소표본에서 dendrogram으로 구조를 직접 확인하기 적합</a:t>
+            </a:r>
+          </a:p>
+        </p:txBody>
+      </p:sp>
+      <p:sp>
+        <p:nvSpPr>
+          <p:cNvPr id="9" name="Rounded Rectangle 8"/>
+          <p:cNvSpPr/>
+          <p:nvPr/>
+        </p:nvSpPr>
+        <p:spPr>
+          <a:xfrm>
+            <a:off x="594360" y="3364992"/>
+            <a:ext cx="4709160" cy="758952"/>
+          </a:xfrm>
+          <a:prstGeom prst="roundRect">
+            <a:avLst/>
+          </a:prstGeom>
+          <a:solidFill>
+            <a:srgbClr val="E0F2EE"/>
+          </a:solidFill>
+          <a:ln>
+            <a:solidFill>
+              <a:srgbClr val="D6DBE1"/>
+            </a:solidFill>
+          </a:ln>
+        </p:spPr>
+        <p:style>
+          <a:lnRef idx="1">
+            <a:schemeClr val="accent1"/>
+          </a:lnRef>
+          <a:fillRef idx="3">
+            <a:schemeClr val="accent1"/>
+          </a:fillRef>
+          <a:effectRef idx="2">
+            <a:schemeClr val="accent1"/>
+          </a:effectRef>
+          <a:fontRef idx="minor">
+            <a:schemeClr val="lt1"/>
+          </a:fontRef>
+        </p:style>
+        <p:txBody>
+          <a:bodyPr rtlCol="0" anchor="ctr" wrap="square">
+            <a:normAutofit/>
+          </a:bodyPr>
+          <a:lstStyle/>
+          <a:p>
+            <a:pPr algn="ctr">
               <a:spcAft>
-                <a:spcPts val="700"/>
+                <a:spcPts val="400"/>
               </a:spcAft>
-              <a:defRPr sz="1700">
-                <a:solidFill>
-                  <a:srgbClr val="262A30"/>
+              <a:defRPr sz="1100" b="1">
+                <a:solidFill>
+                  <a:srgbClr val="1F2B3D"/>
                 </a:solidFill>
                 <a:latin typeface="Aptos"/>
               </a:defRPr>
             </a:pPr>
             <a:r>
-              <a:t>Rows represent academic departments</a:t>
+              <a:t>Feature rule</a:t>
             </a:r>
           </a:p>
           <a:p>
             <a:pPr>
-              <a:spcAft>
-                <a:spcPts val="700"/>
-              </a:spcAft>
-              <a:defRPr sz="1700">
-                <a:solidFill>
-                  <a:srgbClr val="262A30"/>
+              <a:defRPr sz="1000">
+                <a:solidFill>
+                  <a:srgbClr val="272B32"/>
                 </a:solidFill>
                 <a:latin typeface="Aptos"/>
               </a:defRPr>
             </a:pPr>
             <a:r>
-              <a:t>Columns represent recommended high-school courses</a:t>
-            </a:r>
-          </a:p>
-          <a:p>
-            <a:pPr>
-              <a:spcAft>
-                <a:spcPts val="700"/>
-              </a:spcAft>
-              <a:defRPr sz="1700">
-                <a:solidFill>
-                  <a:srgbClr val="262A30"/>
-                </a:solidFill>
-                <a:latin typeface="Aptos"/>
-              </a:defRPr>
-            </a:pPr>
-            <a:r>
-              <a:t>Course values: 1.0 = core, 0.5 = related/supporting, 0.0 = not mentioned</a:t>
-            </a:r>
-          </a:p>
-          <a:p>
-            <a:pPr>
-              <a:spcAft>
-                <a:spcPts val="700"/>
-              </a:spcAft>
-              <a:defRPr sz="1700">
-                <a:solidFill>
-                  <a:srgbClr val="262A30"/>
-                </a:solidFill>
-                <a:latin typeface="Aptos"/>
-              </a:defRPr>
-            </a:pPr>
-            <a:r>
-              <a:t>Only course columns are used as clustering features</a:t>
-            </a:r>
-          </a:p>
-        </p:txBody>
-      </p:sp>
-      <p:sp>
-        <p:nvSpPr>
-          <p:cNvPr id="5" name="TextBox 4"/>
+              <a:t>course columns만 사용하고 department_id/name/broad_field는 제외</a:t>
+            </a:r>
+          </a:p>
+        </p:txBody>
+      </p:sp>
+      <p:pic>
+        <p:nvPicPr>
+          <p:cNvPr id="10" name="Picture 9" descr="hierarchical_dendrogram.png"/>
+          <p:cNvPicPr>
+            <a:picLocks noChangeAspect="1"/>
+          </p:cNvPicPr>
+          <p:nvPr/>
+        </p:nvPicPr>
+        <p:blipFill>
+          <a:blip r:embed="rId2"/>
+          <a:stretch>
+            <a:fillRect/>
+          </a:stretch>
+        </p:blipFill>
+        <p:spPr>
+          <a:xfrm>
+            <a:off x="5715000" y="1234440"/>
+            <a:ext cx="5897880" cy="3794760"/>
+          </a:xfrm>
+          <a:prstGeom prst="rect">
+            <a:avLst/>
+          </a:prstGeom>
+        </p:spPr>
+      </p:pic>
+      <p:sp>
+        <p:nvSpPr>
+          <p:cNvPr id="11" name="TextBox 10"/>
           <p:cNvSpPr txBox="1"/>
           <p:nvPr/>
         </p:nvSpPr>
         <p:spPr>
           <a:xfrm>
-            <a:off x="502920" y="6446520"/>
-            <a:ext cx="11064240" cy="201168"/>
+            <a:off x="5715000" y="5074920"/>
+            <a:ext cx="5897880" cy="201168"/>
           </a:xfrm>
           <a:prstGeom prst="rect">
             <a:avLst/>
@@ -5205,601 +6593,100 @@
           <a:lstStyle/>
           <a:p>
             <a:pPr>
-              <a:defRPr sz="800">
-                <a:solidFill>
-                  <a:srgbClr val="636C76"/>
+              <a:defRPr sz="850">
+                <a:solidFill>
+                  <a:srgbClr val="616A74"/>
                 </a:solidFill>
                 <a:latin typeface="Aptos"/>
               </a:defRPr>
             </a:pPr>
             <a:r>
-              <a:t>NOVA50301 AI Toolkit Progress Meeting | 3/5</a:t>
-            </a:r>
-          </a:p>
-        </p:txBody>
-      </p:sp>
-      <p:graphicFrame>
-        <p:nvGraphicFramePr>
-          <p:cNvPr id="6" name="Table 5"/>
-          <p:cNvGraphicFramePr>
-            <a:graphicFrameLocks noGrp="1"/>
-          </p:cNvGraphicFramePr>
+              <a:t>Figure 1 · Dendrogram (Average linkage, Cosine distance)</a:t>
+            </a:r>
+          </a:p>
+        </p:txBody>
+      </p:sp>
+      <p:sp>
+        <p:nvSpPr>
+          <p:cNvPr id="12" name="Rounded Rectangle 11"/>
+          <p:cNvSpPr/>
           <p:nvPr/>
-        </p:nvGraphicFramePr>
-        <p:xfrm>
-          <a:off x="777240" y="3703320"/>
-          <a:ext cx="10012680" cy="1691640"/>
-        </p:xfrm>
-        <a:graphic>
-          <a:graphicData uri="http://schemas.openxmlformats.org/drawingml/2006/table">
-            <a:tbl>
-              <a:tblPr firstRow="1" bandRow="1">
-                <a:tableStyleId>{5C22544A-7EE6-4342-B048-85BDC9FD1C3A}</a:tableStyleId>
-              </a:tblPr>
-              <a:tblGrid>
-                <a:gridCol w="2926080"/>
-                <a:gridCol w="1417320"/>
-                <a:gridCol w="1417320"/>
-                <a:gridCol w="1417320"/>
-                <a:gridCol w="1417320"/>
-                <a:gridCol w="1417320"/>
-              </a:tblGrid>
-              <a:tr h="422910">
-                <a:tc>
-                  <a:txBody>
-                    <a:bodyPr/>
-                    <a:lstStyle/>
-                    <a:p>
-                      <a:pPr>
-                        <a:defRPr sz="850" b="1">
-                          <a:solidFill>
-                            <a:srgbClr val="FFFFFF"/>
-                          </a:solidFill>
-                        </a:defRPr>
-                      </a:pPr>
-                      <a:r>
-                        <a:t>department_name</a:t>
-                      </a:r>
-                    </a:p>
-                  </a:txBody>
-                  <a:tcPr>
-                    <a:solidFill>
-                      <a:srgbClr val="202D3F"/>
-                    </a:solidFill>
-                  </a:tcPr>
-                </a:tc>
-                <a:tc>
-                  <a:txBody>
-                    <a:bodyPr/>
-                    <a:lstStyle/>
-                    <a:p>
-                      <a:pPr>
-                        <a:defRPr sz="850" b="1">
-                          <a:solidFill>
-                            <a:srgbClr val="FFFFFF"/>
-                          </a:solidFill>
-                        </a:defRPr>
-                      </a:pPr>
-                      <a:r>
-                        <a:t>Mathematics</a:t>
-                      </a:r>
-                    </a:p>
-                  </a:txBody>
-                  <a:tcPr>
-                    <a:solidFill>
-                      <a:srgbClr val="202D3F"/>
-                    </a:solidFill>
-                  </a:tcPr>
-                </a:tc>
-                <a:tc>
-                  <a:txBody>
-                    <a:bodyPr/>
-                    <a:lstStyle/>
-                    <a:p>
-                      <a:pPr>
-                        <a:defRPr sz="850" b="1">
-                          <a:solidFill>
-                            <a:srgbClr val="FFFFFF"/>
-                          </a:solidFill>
-                        </a:defRPr>
-                      </a:pPr>
-                      <a:r>
-                        <a:t>Physics</a:t>
-                      </a:r>
-                    </a:p>
-                  </a:txBody>
-                  <a:tcPr>
-                    <a:solidFill>
-                      <a:srgbClr val="202D3F"/>
-                    </a:solidFill>
-                  </a:tcPr>
-                </a:tc>
-                <a:tc>
-                  <a:txBody>
-                    <a:bodyPr/>
-                    <a:lstStyle/>
-                    <a:p>
-                      <a:pPr>
-                        <a:defRPr sz="850" b="1">
-                          <a:solidFill>
-                            <a:srgbClr val="FFFFFF"/>
-                          </a:solidFill>
-                        </a:defRPr>
-                      </a:pPr>
-                      <a:r>
-                        <a:t>Chemistry</a:t>
-                      </a:r>
-                    </a:p>
-                  </a:txBody>
-                  <a:tcPr>
-                    <a:solidFill>
-                      <a:srgbClr val="202D3F"/>
-                    </a:solidFill>
-                  </a:tcPr>
-                </a:tc>
-                <a:tc>
-                  <a:txBody>
-                    <a:bodyPr/>
-                    <a:lstStyle/>
-                    <a:p>
-                      <a:pPr>
-                        <a:defRPr sz="850" b="1">
-                          <a:solidFill>
-                            <a:srgbClr val="FFFFFF"/>
-                          </a:solidFill>
-                        </a:defRPr>
-                      </a:pPr>
-                      <a:r>
-                        <a:t>Biology</a:t>
-                      </a:r>
-                    </a:p>
-                  </a:txBody>
-                  <a:tcPr>
-                    <a:solidFill>
-                      <a:srgbClr val="202D3F"/>
-                    </a:solidFill>
-                  </a:tcPr>
-                </a:tc>
-                <a:tc>
-                  <a:txBody>
-                    <a:bodyPr/>
-                    <a:lstStyle/>
-                    <a:p>
-                      <a:pPr>
-                        <a:defRPr sz="850" b="1">
-                          <a:solidFill>
-                            <a:srgbClr val="FFFFFF"/>
-                          </a:solidFill>
-                        </a:defRPr>
-                      </a:pPr>
-                      <a:r>
-                        <a:t>Economics</a:t>
-                      </a:r>
-                    </a:p>
-                  </a:txBody>
-                  <a:tcPr>
-                    <a:solidFill>
-                      <a:srgbClr val="202D3F"/>
-                    </a:solidFill>
-                  </a:tcPr>
-                </a:tc>
-              </a:tr>
-              <a:tr h="422910">
-                <a:tc>
-                  <a:txBody>
-                    <a:bodyPr/>
-                    <a:lstStyle/>
-                    <a:p>
-                      <a:pPr>
-                        <a:defRPr sz="850">
-                          <a:solidFill>
-                            <a:srgbClr val="262A30"/>
-                          </a:solidFill>
-                        </a:defRPr>
-                      </a:pPr>
-                      <a:r>
-                        <a:t>Mechanical Engineering</a:t>
-                      </a:r>
-                    </a:p>
-                  </a:txBody>
-                  <a:tcPr/>
-                </a:tc>
-                <a:tc>
-                  <a:txBody>
-                    <a:bodyPr/>
-                    <a:lstStyle/>
-                    <a:p>
-                      <a:pPr>
-                        <a:defRPr sz="850">
-                          <a:solidFill>
-                            <a:srgbClr val="262A30"/>
-                          </a:solidFill>
-                        </a:defRPr>
-                      </a:pPr>
-                      <a:r>
-                        <a:t>1.0</a:t>
-                      </a:r>
-                    </a:p>
-                  </a:txBody>
-                  <a:tcPr>
-                    <a:solidFill>
-                      <a:srgbClr val="E0F2EE"/>
-                    </a:solidFill>
-                  </a:tcPr>
-                </a:tc>
-                <a:tc>
-                  <a:txBody>
-                    <a:bodyPr/>
-                    <a:lstStyle/>
-                    <a:p>
-                      <a:pPr>
-                        <a:defRPr sz="850">
-                          <a:solidFill>
-                            <a:srgbClr val="262A30"/>
-                          </a:solidFill>
-                        </a:defRPr>
-                      </a:pPr>
-                      <a:r>
-                        <a:t>1.0</a:t>
-                      </a:r>
-                    </a:p>
-                  </a:txBody>
-                  <a:tcPr>
-                    <a:solidFill>
-                      <a:srgbClr val="E0F2EE"/>
-                    </a:solidFill>
-                  </a:tcPr>
-                </a:tc>
-                <a:tc>
-                  <a:txBody>
-                    <a:bodyPr/>
-                    <a:lstStyle/>
-                    <a:p>
-                      <a:pPr>
-                        <a:defRPr sz="850">
-                          <a:solidFill>
-                            <a:srgbClr val="262A30"/>
-                          </a:solidFill>
-                        </a:defRPr>
-                      </a:pPr>
-                      <a:r>
-                        <a:t>0.5</a:t>
-                      </a:r>
-                    </a:p>
-                  </a:txBody>
-                  <a:tcPr>
-                    <a:solidFill>
-                      <a:srgbClr val="F6EDD6"/>
-                    </a:solidFill>
-                  </a:tcPr>
-                </a:tc>
-                <a:tc>
-                  <a:txBody>
-                    <a:bodyPr/>
-                    <a:lstStyle/>
-                    <a:p>
-                      <a:pPr>
-                        <a:defRPr sz="850">
-                          <a:solidFill>
-                            <a:srgbClr val="262A30"/>
-                          </a:solidFill>
-                        </a:defRPr>
-                      </a:pPr>
-                      <a:r>
-                        <a:t>0.0</a:t>
-                      </a:r>
-                    </a:p>
-                  </a:txBody>
-                  <a:tcPr/>
-                </a:tc>
-                <a:tc>
-                  <a:txBody>
-                    <a:bodyPr/>
-                    <a:lstStyle/>
-                    <a:p>
-                      <a:pPr>
-                        <a:defRPr sz="850">
-                          <a:solidFill>
-                            <a:srgbClr val="262A30"/>
-                          </a:solidFill>
-                        </a:defRPr>
-                      </a:pPr>
-                      <a:r>
-                        <a:t>0.0</a:t>
-                      </a:r>
-                    </a:p>
-                  </a:txBody>
-                  <a:tcPr/>
-                </a:tc>
-              </a:tr>
-              <a:tr h="422910">
-                <a:tc>
-                  <a:txBody>
-                    <a:bodyPr/>
-                    <a:lstStyle/>
-                    <a:p>
-                      <a:pPr>
-                        <a:defRPr sz="850">
-                          <a:solidFill>
-                            <a:srgbClr val="262A30"/>
-                          </a:solidFill>
-                        </a:defRPr>
-                      </a:pPr>
-                      <a:r>
-                        <a:t>Biology</a:t>
-                      </a:r>
-                    </a:p>
-                  </a:txBody>
-                  <a:tcPr/>
-                </a:tc>
-                <a:tc>
-                  <a:txBody>
-                    <a:bodyPr/>
-                    <a:lstStyle/>
-                    <a:p>
-                      <a:pPr>
-                        <a:defRPr sz="850">
-                          <a:solidFill>
-                            <a:srgbClr val="262A30"/>
-                          </a:solidFill>
-                        </a:defRPr>
-                      </a:pPr>
-                      <a:r>
-                        <a:t>0.5</a:t>
-                      </a:r>
-                    </a:p>
-                  </a:txBody>
-                  <a:tcPr>
-                    <a:solidFill>
-                      <a:srgbClr val="F6EDD6"/>
-                    </a:solidFill>
-                  </a:tcPr>
-                </a:tc>
-                <a:tc>
-                  <a:txBody>
-                    <a:bodyPr/>
-                    <a:lstStyle/>
-                    <a:p>
-                      <a:pPr>
-                        <a:defRPr sz="850">
-                          <a:solidFill>
-                            <a:srgbClr val="262A30"/>
-                          </a:solidFill>
-                        </a:defRPr>
-                      </a:pPr>
-                      <a:r>
-                        <a:t>0.0</a:t>
-                      </a:r>
-                    </a:p>
-                  </a:txBody>
-                  <a:tcPr/>
-                </a:tc>
-                <a:tc>
-                  <a:txBody>
-                    <a:bodyPr/>
-                    <a:lstStyle/>
-                    <a:p>
-                      <a:pPr>
-                        <a:defRPr sz="850">
-                          <a:solidFill>
-                            <a:srgbClr val="262A30"/>
-                          </a:solidFill>
-                        </a:defRPr>
-                      </a:pPr>
-                      <a:r>
-                        <a:t>1.0</a:t>
-                      </a:r>
-                    </a:p>
-                  </a:txBody>
-                  <a:tcPr>
-                    <a:solidFill>
-                      <a:srgbClr val="E0F2EE"/>
-                    </a:solidFill>
-                  </a:tcPr>
-                </a:tc>
-                <a:tc>
-                  <a:txBody>
-                    <a:bodyPr/>
-                    <a:lstStyle/>
-                    <a:p>
-                      <a:pPr>
-                        <a:defRPr sz="850">
-                          <a:solidFill>
-                            <a:srgbClr val="262A30"/>
-                          </a:solidFill>
-                        </a:defRPr>
-                      </a:pPr>
-                      <a:r>
-                        <a:t>1.0</a:t>
-                      </a:r>
-                    </a:p>
-                  </a:txBody>
-                  <a:tcPr>
-                    <a:solidFill>
-                      <a:srgbClr val="E0F2EE"/>
-                    </a:solidFill>
-                  </a:tcPr>
-                </a:tc>
-                <a:tc>
-                  <a:txBody>
-                    <a:bodyPr/>
-                    <a:lstStyle/>
-                    <a:p>
-                      <a:pPr>
-                        <a:defRPr sz="850">
-                          <a:solidFill>
-                            <a:srgbClr val="262A30"/>
-                          </a:solidFill>
-                        </a:defRPr>
-                      </a:pPr>
-                      <a:r>
-                        <a:t>0.0</a:t>
-                      </a:r>
-                    </a:p>
-                  </a:txBody>
-                  <a:tcPr/>
-                </a:tc>
-              </a:tr>
-              <a:tr h="422910">
-                <a:tc>
-                  <a:txBody>
-                    <a:bodyPr/>
-                    <a:lstStyle/>
-                    <a:p>
-                      <a:pPr>
-                        <a:defRPr sz="850">
-                          <a:solidFill>
-                            <a:srgbClr val="262A30"/>
-                          </a:solidFill>
-                        </a:defRPr>
-                      </a:pPr>
-                      <a:r>
-                        <a:t>Business Administration</a:t>
-                      </a:r>
-                    </a:p>
-                  </a:txBody>
-                  <a:tcPr/>
-                </a:tc>
-                <a:tc>
-                  <a:txBody>
-                    <a:bodyPr/>
-                    <a:lstStyle/>
-                    <a:p>
-                      <a:pPr>
-                        <a:defRPr sz="850">
-                          <a:solidFill>
-                            <a:srgbClr val="262A30"/>
-                          </a:solidFill>
-                        </a:defRPr>
-                      </a:pPr>
-                      <a:r>
-                        <a:t>0.5</a:t>
-                      </a:r>
-                    </a:p>
-                  </a:txBody>
-                  <a:tcPr>
-                    <a:solidFill>
-                      <a:srgbClr val="F6EDD6"/>
-                    </a:solidFill>
-                  </a:tcPr>
-                </a:tc>
-                <a:tc>
-                  <a:txBody>
-                    <a:bodyPr/>
-                    <a:lstStyle/>
-                    <a:p>
-                      <a:pPr>
-                        <a:defRPr sz="850">
-                          <a:solidFill>
-                            <a:srgbClr val="262A30"/>
-                          </a:solidFill>
-                        </a:defRPr>
-                      </a:pPr>
-                      <a:r>
-                        <a:t>0.0</a:t>
-                      </a:r>
-                    </a:p>
-                  </a:txBody>
-                  <a:tcPr/>
-                </a:tc>
-                <a:tc>
-                  <a:txBody>
-                    <a:bodyPr/>
-                    <a:lstStyle/>
-                    <a:p>
-                      <a:pPr>
-                        <a:defRPr sz="850">
-                          <a:solidFill>
-                            <a:srgbClr val="262A30"/>
-                          </a:solidFill>
-                        </a:defRPr>
-                      </a:pPr>
-                      <a:r>
-                        <a:t>0.0</a:t>
-                      </a:r>
-                    </a:p>
-                  </a:txBody>
-                  <a:tcPr/>
-                </a:tc>
-                <a:tc>
-                  <a:txBody>
-                    <a:bodyPr/>
-                    <a:lstStyle/>
-                    <a:p>
-                      <a:pPr>
-                        <a:defRPr sz="850">
-                          <a:solidFill>
-                            <a:srgbClr val="262A30"/>
-                          </a:solidFill>
-                        </a:defRPr>
-                      </a:pPr>
-                      <a:r>
-                        <a:t>0.0</a:t>
-                      </a:r>
-                    </a:p>
-                  </a:txBody>
-                  <a:tcPr/>
-                </a:tc>
-                <a:tc>
-                  <a:txBody>
-                    <a:bodyPr/>
-                    <a:lstStyle/>
-                    <a:p>
-                      <a:pPr>
-                        <a:defRPr sz="850">
-                          <a:solidFill>
-                            <a:srgbClr val="262A30"/>
-                          </a:solidFill>
-                        </a:defRPr>
-                      </a:pPr>
-                      <a:r>
-                        <a:t>1.0</a:t>
-                      </a:r>
-                    </a:p>
-                  </a:txBody>
-                  <a:tcPr>
-                    <a:solidFill>
-                      <a:srgbClr val="E0F2EE"/>
-                    </a:solidFill>
-                  </a:tcPr>
-                </a:tc>
-              </a:tr>
-            </a:tbl>
-          </a:graphicData>
-        </a:graphic>
-      </p:graphicFrame>
-      <p:sp>
-        <p:nvSpPr>
-          <p:cNvPr id="7" name="TextBox 6"/>
-          <p:cNvSpPr txBox="1"/>
-          <p:nvPr/>
-        </p:nvSpPr>
-        <p:spPr>
-          <a:xfrm>
-            <a:off x="777240" y="5532120"/>
-            <a:ext cx="7772400" cy="228600"/>
-          </a:xfrm>
-          <a:prstGeom prst="rect">
+        </p:nvSpPr>
+        <p:spPr>
+          <a:xfrm>
+            <a:off x="5715000" y="5349240"/>
+            <a:ext cx="5897880" cy="502920"/>
+          </a:xfrm>
+          <a:prstGeom prst="roundRect">
             <a:avLst/>
           </a:prstGeom>
-          <a:noFill/>
-        </p:spPr>
-        <p:txBody>
-          <a:bodyPr wrap="square">
-            <a:spAutoFit/>
+          <a:solidFill>
+            <a:srgbClr val="FFFFFF"/>
+          </a:solidFill>
+          <a:ln>
+            <a:solidFill>
+              <a:srgbClr val="D6DBE1"/>
+            </a:solidFill>
+          </a:ln>
+        </p:spPr>
+        <p:style>
+          <a:lnRef idx="1">
+            <a:schemeClr val="accent1"/>
+          </a:lnRef>
+          <a:fillRef idx="3">
+            <a:schemeClr val="accent1"/>
+          </a:fillRef>
+          <a:effectRef idx="2">
+            <a:schemeClr val="accent1"/>
+          </a:effectRef>
+          <a:fontRef idx="minor">
+            <a:schemeClr val="lt1"/>
+          </a:fontRef>
+        </p:style>
+        <p:txBody>
+          <a:bodyPr rtlCol="0" anchor="ctr" wrap="square">
+            <a:normAutofit/>
           </a:bodyPr>
           <a:lstStyle/>
+          <a:p>
+            <a:pPr algn="ctr">
+              <a:spcAft>
+                <a:spcPts val="400"/>
+              </a:spcAft>
+              <a:defRPr sz="1100" b="1">
+                <a:solidFill>
+                  <a:srgbClr val="1F2B3D"/>
+                </a:solidFill>
+                <a:latin typeface="Aptos"/>
+              </a:defRPr>
+            </a:pPr>
+            <a:r>
+              <a:t>군집 요약</a:t>
+            </a:r>
+          </a:p>
           <a:p>
             <a:pPr>
               <a:defRPr sz="1000">
                 <a:solidFill>
-                  <a:srgbClr val="636C76"/>
+                  <a:srgbClr val="272B32"/>
                 </a:solidFill>
                 <a:latin typeface="Aptos"/>
               </a:defRPr>
             </a:pPr>
             <a:r>
-              <a:t>Recommended table: department-course matrix preview</a:t>
+              <a:t>C1: 17개 (건축학과, 기계공학과, 화학과...)</a:t>
+            </a:r>
+            <a:br/>
+            <a:r>
+              <a:t>C2: 6개 (심리학과, 경영학과, 사회학과...)</a:t>
+            </a:r>
+            <a:br/>
+            <a:r>
+              <a:t>C3: 1개 (국어국문학과)</a:t>
+            </a:r>
+            <a:br/>
+            <a:r>
+              <a:t>C4: 1개 (디자인학과)</a:t>
             </a:r>
           </a:p>
         </p:txBody>
@@ -5839,7 +6726,7 @@
         <p:spPr>
           <a:xfrm>
             <a:off x="502920" y="228600"/>
-            <a:ext cx="11155680" cy="502920"/>
+            <a:ext cx="8961120" cy="411480"/>
           </a:xfrm>
           <a:prstGeom prst="rect">
             <a:avLst/>
@@ -5855,33 +6742,69 @@
             <a:pPr>
               <a:defRPr sz="2400" b="1">
                 <a:solidFill>
-                  <a:srgbClr val="202D3F"/>
+                  <a:srgbClr val="1F2B3D"/>
                 </a:solidFill>
                 <a:latin typeface="Aptos Display"/>
               </a:defRPr>
             </a:pPr>
             <a:r>
-              <a:t>Method and Preliminary Result</a:t>
-            </a:r>
-          </a:p>
-        </p:txBody>
-      </p:sp>
-      <p:sp>
-        <p:nvSpPr>
-          <p:cNvPr id="3" name="Rectangle 2"/>
-          <p:cNvSpPr/>
+              <a:t>예비 결과</a:t>
+            </a:r>
+          </a:p>
+        </p:txBody>
+      </p:sp>
+      <p:sp>
+        <p:nvSpPr>
+          <p:cNvPr id="3" name="TextBox 2"/>
+          <p:cNvSpPr txBox="1"/>
           <p:nvPr/>
         </p:nvSpPr>
         <p:spPr>
           <a:xfrm>
-            <a:off x="502920" y="804672"/>
-            <a:ext cx="1051560" cy="54864"/>
+            <a:off x="530352" y="685800"/>
+            <a:ext cx="8961120" cy="256032"/>
           </a:xfrm>
           <a:prstGeom prst="rect">
             <a:avLst/>
           </a:prstGeom>
+          <a:noFill/>
+        </p:spPr>
+        <p:txBody>
+          <a:bodyPr wrap="none">
+            <a:spAutoFit/>
+          </a:bodyPr>
+          <a:lstStyle/>
+          <a:p>
+            <a:pPr>
+              <a:defRPr sz="1100">
+                <a:solidFill>
+                  <a:srgbClr val="616A74"/>
+                </a:solidFill>
+                <a:latin typeface="Aptos"/>
+              </a:defRPr>
+            </a:pPr>
+            <a:r>
+              <a:t>Heatmap · 상위 유사도 pair · 해석 포인트</a:t>
+            </a:r>
+          </a:p>
+        </p:txBody>
+      </p:sp>
+      <p:sp>
+        <p:nvSpPr>
+          <p:cNvPr id="4" name="Rounded Rectangle 3"/>
+          <p:cNvSpPr/>
+          <p:nvPr/>
+        </p:nvSpPr>
+        <p:spPr>
+          <a:xfrm>
+            <a:off x="10698480" y="292608"/>
+            <a:ext cx="960120" cy="347472"/>
+          </a:xfrm>
+          <a:prstGeom prst="roundRect">
+            <a:avLst/>
+          </a:prstGeom>
           <a:solidFill>
-            <a:srgbClr val="278E89"/>
+            <a:srgbClr val="1F2B3D"/>
           </a:solidFill>
           <a:ln>
             <a:noFill/>
@@ -5905,20 +6828,30 @@
           <a:bodyPr rtlCol="0" anchor="ctr"/>
           <a:lstStyle/>
           <a:p>
-            <a:pPr algn="ctr"/>
-          </a:p>
-        </p:txBody>
-      </p:sp>
-      <p:sp>
-        <p:nvSpPr>
-          <p:cNvPr id="4" name="TextBox 3"/>
+            <a:pPr algn="ctr">
+              <a:defRPr sz="1000" b="1">
+                <a:solidFill>
+                  <a:srgbClr val="FFFFFF"/>
+                </a:solidFill>
+                <a:latin typeface="Aptos"/>
+              </a:defRPr>
+            </a:pPr>
+            <a:r>
+              <a:t>4 / 5</a:t>
+            </a:r>
+          </a:p>
+        </p:txBody>
+      </p:sp>
+      <p:sp>
+        <p:nvSpPr>
+          <p:cNvPr id="5" name="TextBox 4"/>
           <p:cNvSpPr txBox="1"/>
           <p:nvPr/>
         </p:nvSpPr>
         <p:spPr>
           <a:xfrm>
-            <a:off x="777240" y="1234440"/>
-            <a:ext cx="4983480" cy="2880360"/>
+            <a:off x="502920" y="6446520"/>
+            <a:ext cx="11155680" cy="228600"/>
           </a:xfrm>
           <a:prstGeom prst="rect">
             <a:avLst/>
@@ -5926,109 +6859,6 @@
           <a:noFill/>
         </p:spPr>
         <p:txBody>
-          <a:bodyPr wrap="square">
-            <a:normAutofit/>
-          </a:bodyPr>
-          <a:lstStyle/>
-          <a:p>
-            <a:pPr>
-              <a:spcAft>
-                <a:spcPts val="700"/>
-              </a:spcAft>
-              <a:defRPr sz="1700">
-                <a:solidFill>
-                  <a:srgbClr val="262A30"/>
-                </a:solidFill>
-                <a:latin typeface="Aptos"/>
-              </a:defRPr>
-            </a:pPr>
-            <a:r>
-              <a:t>Hierarchical clustering was implemented as the first clustering method</a:t>
-            </a:r>
-          </a:p>
-          <a:p>
-            <a:pPr>
-              <a:spcAft>
-                <a:spcPts val="700"/>
-              </a:spcAft>
-              <a:defRPr sz="1700">
-                <a:solidFill>
-                  <a:srgbClr val="262A30"/>
-                </a:solidFill>
-                <a:latin typeface="Aptos"/>
-              </a:defRPr>
-            </a:pPr>
-            <a:r>
-              <a:t>Clustering is based only on course-profile similarity</a:t>
-            </a:r>
-          </a:p>
-          <a:p>
-            <a:pPr>
-              <a:spcAft>
-                <a:spcPts val="700"/>
-              </a:spcAft>
-              <a:defRPr sz="1700">
-                <a:solidFill>
-                  <a:srgbClr val="262A30"/>
-                </a:solidFill>
-                <a:latin typeface="Aptos"/>
-              </a:defRPr>
-            </a:pPr>
-            <a:r>
-              <a:t>Preliminary outputs include similarity matrix, heatmap, dendrogram, and cluster assignments</a:t>
-            </a:r>
-          </a:p>
-          <a:p>
-            <a:pPr>
-              <a:spcAft>
-                <a:spcPts val="700"/>
-              </a:spcAft>
-              <a:defRPr sz="1700">
-                <a:solidFill>
-                  <a:srgbClr val="262A30"/>
-                </a:solidFill>
-                <a:latin typeface="Aptos"/>
-              </a:defRPr>
-            </a:pPr>
-            <a:r>
-              <a:t>Results should be interpreted as exploratory, not definitive</a:t>
-            </a:r>
-          </a:p>
-          <a:p>
-            <a:pPr>
-              <a:spcAft>
-                <a:spcPts val="700"/>
-              </a:spcAft>
-              <a:defRPr sz="1700">
-                <a:solidFill>
-                  <a:srgbClr val="262A30"/>
-                </a:solidFill>
-                <a:latin typeface="Aptos"/>
-              </a:defRPr>
-            </a:pPr>
-            <a:r>
-              <a:t>Early clusters help check whether course-based patterns are interpretable</a:t>
-            </a:r>
-          </a:p>
-        </p:txBody>
-      </p:sp>
-      <p:sp>
-        <p:nvSpPr>
-          <p:cNvPr id="5" name="TextBox 4"/>
-          <p:cNvSpPr txBox="1"/>
-          <p:nvPr/>
-        </p:nvSpPr>
-        <p:spPr>
-          <a:xfrm>
-            <a:off x="502920" y="6446520"/>
-            <a:ext cx="11064240" cy="201168"/>
-          </a:xfrm>
-          <a:prstGeom prst="rect">
-            <a:avLst/>
-          </a:prstGeom>
-          <a:noFill/>
-        </p:spPr>
-        <p:txBody>
           <a:bodyPr wrap="none">
             <a:spAutoFit/>
           </a:bodyPr>
@@ -6037,35 +6867,35 @@
             <a:pPr>
               <a:defRPr sz="800">
                 <a:solidFill>
-                  <a:srgbClr val="636C76"/>
+                  <a:srgbClr val="616A74"/>
                 </a:solidFill>
                 <a:latin typeface="Aptos"/>
               </a:defRPr>
             </a:pPr>
             <a:r>
-              <a:t>NOVA50301 AI Toolkit Progress Meeting | 4/5</a:t>
+              <a:t>NOVA50301 AI Toolkit · Progress Meeting · 4/5</a:t>
             </a:r>
           </a:p>
         </p:txBody>
       </p:sp>
       <p:pic>
         <p:nvPicPr>
-          <p:cNvPr id="6" name="Picture 5" descr="hierarchical_dendrogram.png"/>
+          <p:cNvPr id="6" name="Picture 5" descr="course_similarity_heatmap.png"/>
           <p:cNvPicPr>
             <a:picLocks noChangeAspect="1"/>
           </p:cNvPicPr>
           <p:nvPr/>
         </p:nvPicPr>
         <p:blipFill>
-          <a:blip r:embed="rId3"/>
+          <a:blip r:embed="rId2"/>
           <a:stretch>
             <a:fillRect/>
           </a:stretch>
         </p:blipFill>
         <p:spPr>
           <a:xfrm>
-            <a:off x="6172200" y="1234440"/>
-            <a:ext cx="5394960" cy="3840480"/>
+            <a:off x="594360" y="1143000"/>
+            <a:ext cx="5715000" cy="4343400"/>
           </a:xfrm>
           <a:prstGeom prst="rect">
             <a:avLst/>
@@ -6080,8 +6910,8 @@
         </p:nvSpPr>
         <p:spPr>
           <a:xfrm>
-            <a:off x="6172200" y="5212080"/>
-            <a:ext cx="5120640" cy="292608"/>
+            <a:off x="594360" y="5532120"/>
+            <a:ext cx="5715000" cy="201168"/>
           </a:xfrm>
           <a:prstGeom prst="rect">
             <a:avLst/>
@@ -6089,21 +6919,378 @@
           <a:noFill/>
         </p:spPr>
         <p:txBody>
-          <a:bodyPr wrap="square">
+          <a:bodyPr wrap="none">
             <a:spAutoFit/>
           </a:bodyPr>
           <a:lstStyle/>
           <a:p>
             <a:pPr>
+              <a:defRPr sz="850">
+                <a:solidFill>
+                  <a:srgbClr val="616A74"/>
+                </a:solidFill>
+                <a:latin typeface="Aptos"/>
+              </a:defRPr>
+            </a:pPr>
+            <a:r>
+              <a:t>Figure 2 · Course-profile cosine similarity heatmap</a:t>
+            </a:r>
+          </a:p>
+        </p:txBody>
+      </p:sp>
+      <p:sp>
+        <p:nvSpPr>
+          <p:cNvPr id="8" name="Rounded Rectangle 7"/>
+          <p:cNvSpPr/>
+          <p:nvPr/>
+        </p:nvSpPr>
+        <p:spPr>
+          <a:xfrm>
+            <a:off x="6629400" y="1143000"/>
+            <a:ext cx="1005840" cy="292608"/>
+          </a:xfrm>
+          <a:prstGeom prst="roundRect">
+            <a:avLst/>
+          </a:prstGeom>
+          <a:solidFill>
+            <a:srgbClr val="1F2B3D"/>
+          </a:solidFill>
+          <a:ln>
+            <a:noFill/>
+          </a:ln>
+        </p:spPr>
+        <p:style>
+          <a:lnRef idx="1">
+            <a:schemeClr val="accent1"/>
+          </a:lnRef>
+          <a:fillRef idx="3">
+            <a:schemeClr val="accent1"/>
+          </a:fillRef>
+          <a:effectRef idx="2">
+            <a:schemeClr val="accent1"/>
+          </a:effectRef>
+          <a:fontRef idx="minor">
+            <a:schemeClr val="lt1"/>
+          </a:fontRef>
+        </p:style>
+        <p:txBody>
+          <a:bodyPr rtlCol="0" anchor="ctr"/>
+          <a:lstStyle/>
+          <a:p>
+            <a:pPr algn="ctr">
+              <a:defRPr sz="1000" b="1">
+                <a:solidFill>
+                  <a:srgbClr val="FFFFFF"/>
+                </a:solidFill>
+                <a:latin typeface="Aptos"/>
+              </a:defRPr>
+            </a:pPr>
+            <a:r>
+              <a:t>정량 요약</a:t>
+            </a:r>
+          </a:p>
+        </p:txBody>
+      </p:sp>
+      <p:sp>
+        <p:nvSpPr>
+          <p:cNvPr id="9" name="Rounded Rectangle 8"/>
+          <p:cNvSpPr/>
+          <p:nvPr/>
+        </p:nvSpPr>
+        <p:spPr>
+          <a:xfrm>
+            <a:off x="6629400" y="1572768"/>
+            <a:ext cx="4526280" cy="1143000"/>
+          </a:xfrm>
+          <a:prstGeom prst="roundRect">
+            <a:avLst/>
+          </a:prstGeom>
+          <a:solidFill>
+            <a:srgbClr val="E0F2EE"/>
+          </a:solidFill>
+          <a:ln>
+            <a:solidFill>
+              <a:srgbClr val="D6DBE1"/>
+            </a:solidFill>
+          </a:ln>
+        </p:spPr>
+        <p:style>
+          <a:lnRef idx="1">
+            <a:schemeClr val="accent1"/>
+          </a:lnRef>
+          <a:fillRef idx="3">
+            <a:schemeClr val="accent1"/>
+          </a:fillRef>
+          <a:effectRef idx="2">
+            <a:schemeClr val="accent1"/>
+          </a:effectRef>
+          <a:fontRef idx="minor">
+            <a:schemeClr val="lt1"/>
+          </a:fontRef>
+        </p:style>
+        <p:txBody>
+          <a:bodyPr rtlCol="0" anchor="ctr" wrap="square">
+            <a:normAutofit/>
+          </a:bodyPr>
+          <a:lstStyle/>
+          <a:p>
+            <a:pPr algn="ctr">
+              <a:spcAft>
+                <a:spcPts val="400"/>
+              </a:spcAft>
+              <a:defRPr sz="1100" b="1">
+                <a:solidFill>
+                  <a:srgbClr val="1F2B3D"/>
+                </a:solidFill>
+                <a:latin typeface="Aptos"/>
+              </a:defRPr>
+            </a:pPr>
+            <a:r>
+              <a:t>Top similarity pairs</a:t>
+            </a:r>
+          </a:p>
+          <a:p>
+            <a:pPr>
               <a:defRPr sz="1000">
                 <a:solidFill>
-                  <a:srgbClr val="636C76"/>
+                  <a:srgbClr val="272B32"/>
                 </a:solidFill>
                 <a:latin typeface="Aptos"/>
               </a:defRPr>
             </a:pPr>
             <a:r>
-              <a:t>Recommended figure: hierarchical_dendrogram.png</a:t>
+              <a:t>화학과–화학공학과: 1.000</a:t>
+            </a:r>
+            <a:br/>
+            <a:r>
+              <a:t>경영학과–경제학과: 1.000</a:t>
+            </a:r>
+            <a:br/>
+            <a:r>
+              <a:t>기계공학과–자동차공학과: 0.951</a:t>
+            </a:r>
+            <a:br/>
+            <a:r>
+              <a:t>기계공학과–전기전자공학과: 0.947</a:t>
+            </a:r>
+          </a:p>
+        </p:txBody>
+      </p:sp>
+      <p:sp>
+        <p:nvSpPr>
+          <p:cNvPr id="10" name="Rounded Rectangle 9"/>
+          <p:cNvSpPr/>
+          <p:nvPr/>
+        </p:nvSpPr>
+        <p:spPr>
+          <a:xfrm>
+            <a:off x="6629400" y="2907792"/>
+            <a:ext cx="4526280" cy="868680"/>
+          </a:xfrm>
+          <a:prstGeom prst="roundRect">
+            <a:avLst/>
+          </a:prstGeom>
+          <a:solidFill>
+            <a:srgbClr val="F4F6F8"/>
+          </a:solidFill>
+          <a:ln>
+            <a:solidFill>
+              <a:srgbClr val="D6DBE1"/>
+            </a:solidFill>
+          </a:ln>
+        </p:spPr>
+        <p:style>
+          <a:lnRef idx="1">
+            <a:schemeClr val="accent1"/>
+          </a:lnRef>
+          <a:fillRef idx="3">
+            <a:schemeClr val="accent1"/>
+          </a:fillRef>
+          <a:effectRef idx="2">
+            <a:schemeClr val="accent1"/>
+          </a:effectRef>
+          <a:fontRef idx="minor">
+            <a:schemeClr val="lt1"/>
+          </a:fontRef>
+        </p:style>
+        <p:txBody>
+          <a:bodyPr rtlCol="0" anchor="ctr" wrap="square">
+            <a:normAutofit/>
+          </a:bodyPr>
+          <a:lstStyle/>
+          <a:p>
+            <a:pPr algn="ctr">
+              <a:spcAft>
+                <a:spcPts val="400"/>
+              </a:spcAft>
+              <a:defRPr sz="1100" b="1">
+                <a:solidFill>
+                  <a:srgbClr val="1F2B3D"/>
+                </a:solidFill>
+                <a:latin typeface="Aptos"/>
+              </a:defRPr>
+            </a:pPr>
+            <a:r>
+              <a:t>핵심 발견 1</a:t>
+            </a:r>
+          </a:p>
+          <a:p>
+            <a:pPr>
+              <a:defRPr sz="1000">
+                <a:solidFill>
+                  <a:srgbClr val="272B32"/>
+                </a:solidFill>
+                <a:latin typeface="Aptos"/>
+              </a:defRPr>
+            </a:pPr>
+            <a:r>
+              <a:t>자동차공학과는 기계공학과·전기전자공학과와 높은 유사도를 보여 applied engineering boundary case로 설명 가능</a:t>
+            </a:r>
+          </a:p>
+        </p:txBody>
+      </p:sp>
+      <p:sp>
+        <p:nvSpPr>
+          <p:cNvPr id="11" name="Rounded Rectangle 10"/>
+          <p:cNvSpPr/>
+          <p:nvPr/>
+        </p:nvSpPr>
+        <p:spPr>
+          <a:xfrm>
+            <a:off x="6629400" y="3931920"/>
+            <a:ext cx="4526280" cy="868680"/>
+          </a:xfrm>
+          <a:prstGeom prst="roundRect">
+            <a:avLst/>
+          </a:prstGeom>
+          <a:solidFill>
+            <a:srgbClr val="F4F6F8"/>
+          </a:solidFill>
+          <a:ln>
+            <a:solidFill>
+              <a:srgbClr val="D6DBE1"/>
+            </a:solidFill>
+          </a:ln>
+        </p:spPr>
+        <p:style>
+          <a:lnRef idx="1">
+            <a:schemeClr val="accent1"/>
+          </a:lnRef>
+          <a:fillRef idx="3">
+            <a:schemeClr val="accent1"/>
+          </a:fillRef>
+          <a:effectRef idx="2">
+            <a:schemeClr val="accent1"/>
+          </a:effectRef>
+          <a:fontRef idx="minor">
+            <a:schemeClr val="lt1"/>
+          </a:fontRef>
+        </p:style>
+        <p:txBody>
+          <a:bodyPr rtlCol="0" anchor="ctr" wrap="square">
+            <a:normAutofit/>
+          </a:bodyPr>
+          <a:lstStyle/>
+          <a:p>
+            <a:pPr algn="ctr">
+              <a:spcAft>
+                <a:spcPts val="400"/>
+              </a:spcAft>
+              <a:defRPr sz="1100" b="1">
+                <a:solidFill>
+                  <a:srgbClr val="1F2B3D"/>
+                </a:solidFill>
+                <a:latin typeface="Aptos"/>
+              </a:defRPr>
+            </a:pPr>
+            <a:r>
+              <a:t>핵심 발견 2</a:t>
+            </a:r>
+          </a:p>
+          <a:p>
+            <a:pPr>
+              <a:defRPr sz="1000">
+                <a:solidFill>
+                  <a:srgbClr val="272B32"/>
+                </a:solidFill>
+                <a:latin typeface="Aptos"/>
+              </a:defRPr>
+            </a:pPr>
+            <a:r>
+              <a:t>공학/자연/의약/정량 계열이 큰 군집으로 묶여 세부 해석에는 local similarity 확인이 필요</a:t>
+            </a:r>
+          </a:p>
+        </p:txBody>
+      </p:sp>
+      <p:sp>
+        <p:nvSpPr>
+          <p:cNvPr id="12" name="Rounded Rectangle 11"/>
+          <p:cNvSpPr/>
+          <p:nvPr/>
+        </p:nvSpPr>
+        <p:spPr>
+          <a:xfrm>
+            <a:off x="6629400" y="4956048"/>
+            <a:ext cx="4526280" cy="658368"/>
+          </a:xfrm>
+          <a:prstGeom prst="roundRect">
+            <a:avLst/>
+          </a:prstGeom>
+          <a:solidFill>
+            <a:srgbClr val="F9EFDC"/>
+          </a:solidFill>
+          <a:ln>
+            <a:solidFill>
+              <a:srgbClr val="D6DBE1"/>
+            </a:solidFill>
+          </a:ln>
+        </p:spPr>
+        <p:style>
+          <a:lnRef idx="1">
+            <a:schemeClr val="accent1"/>
+          </a:lnRef>
+          <a:fillRef idx="3">
+            <a:schemeClr val="accent1"/>
+          </a:fillRef>
+          <a:effectRef idx="2">
+            <a:schemeClr val="accent1"/>
+          </a:effectRef>
+          <a:fontRef idx="minor">
+            <a:schemeClr val="lt1"/>
+          </a:fontRef>
+        </p:style>
+        <p:txBody>
+          <a:bodyPr rtlCol="0" anchor="ctr" wrap="square">
+            <a:normAutofit/>
+          </a:bodyPr>
+          <a:lstStyle/>
+          <a:p>
+            <a:pPr algn="ctr">
+              <a:spcAft>
+                <a:spcPts val="400"/>
+              </a:spcAft>
+              <a:defRPr sz="1100" b="1">
+                <a:solidFill>
+                  <a:srgbClr val="1F2B3D"/>
+                </a:solidFill>
+                <a:latin typeface="Aptos"/>
+              </a:defRPr>
+            </a:pPr>
+            <a:r>
+              <a:t>주의</a:t>
+            </a:r>
+          </a:p>
+          <a:p>
+            <a:pPr>
+              <a:defRPr sz="1000">
+                <a:solidFill>
+                  <a:srgbClr val="272B32"/>
+                </a:solidFill>
+                <a:latin typeface="Aptos"/>
+              </a:defRPr>
+            </a:pPr>
+            <a:r>
+              <a:t>결과는 exploratory pattern이며 최종 추천/분류가 아님</a:t>
             </a:r>
           </a:p>
         </p:txBody>
@@ -6143,7 +7330,7 @@
         <p:spPr>
           <a:xfrm>
             <a:off x="502920" y="228600"/>
-            <a:ext cx="11155680" cy="502920"/>
+            <a:ext cx="8961120" cy="411480"/>
           </a:xfrm>
           <a:prstGeom prst="rect">
             <a:avLst/>
@@ -6159,33 +7346,69 @@
             <a:pPr>
               <a:defRPr sz="2400" b="1">
                 <a:solidFill>
-                  <a:srgbClr val="202D3F"/>
+                  <a:srgbClr val="1F2B3D"/>
                 </a:solidFill>
                 <a:latin typeface="Aptos Display"/>
               </a:defRPr>
             </a:pPr>
             <a:r>
-              <a:t>Next Steps</a:t>
-            </a:r>
-          </a:p>
-        </p:txBody>
-      </p:sp>
-      <p:sp>
-        <p:nvSpPr>
-          <p:cNvPr id="3" name="Rectangle 2"/>
-          <p:cNvSpPr/>
+              <a:t>다음 단계</a:t>
+            </a:r>
+          </a:p>
+        </p:txBody>
+      </p:sp>
+      <p:sp>
+        <p:nvSpPr>
+          <p:cNvPr id="3" name="TextBox 2"/>
+          <p:cNvSpPr txBox="1"/>
           <p:nvPr/>
         </p:nvSpPr>
         <p:spPr>
           <a:xfrm>
-            <a:off x="502920" y="804672"/>
-            <a:ext cx="1051560" cy="54864"/>
+            <a:off x="530352" y="685800"/>
+            <a:ext cx="8961120" cy="256032"/>
           </a:xfrm>
           <a:prstGeom prst="rect">
             <a:avLst/>
           </a:prstGeom>
+          <a:noFill/>
+        </p:spPr>
+        <p:txBody>
+          <a:bodyPr wrap="none">
+            <a:spAutoFit/>
+          </a:bodyPr>
+          <a:lstStyle/>
+          <a:p>
+            <a:pPr>
+              <a:defRPr sz="1100">
+                <a:solidFill>
+                  <a:srgbClr val="616A74"/>
+                </a:solidFill>
+                <a:latin typeface="Aptos"/>
+              </a:defRPr>
+            </a:pPr>
+            <a:r>
+              <a:t>Final Report에서 확장할 분석과 보수적 해석</a:t>
+            </a:r>
+          </a:p>
+        </p:txBody>
+      </p:sp>
+      <p:sp>
+        <p:nvSpPr>
+          <p:cNvPr id="4" name="Rounded Rectangle 3"/>
+          <p:cNvSpPr/>
+          <p:nvPr/>
+        </p:nvSpPr>
+        <p:spPr>
+          <a:xfrm>
+            <a:off x="10698480" y="292608"/>
+            <a:ext cx="960120" cy="347472"/>
+          </a:xfrm>
+          <a:prstGeom prst="roundRect">
+            <a:avLst/>
+          </a:prstGeom>
           <a:solidFill>
-            <a:srgbClr val="278E89"/>
+            <a:srgbClr val="1F2B3D"/>
           </a:solidFill>
           <a:ln>
             <a:noFill/>
@@ -6209,20 +7432,30 @@
           <a:bodyPr rtlCol="0" anchor="ctr"/>
           <a:lstStyle/>
           <a:p>
-            <a:pPr algn="ctr"/>
-          </a:p>
-        </p:txBody>
-      </p:sp>
-      <p:sp>
-        <p:nvSpPr>
-          <p:cNvPr id="4" name="TextBox 3"/>
+            <a:pPr algn="ctr">
+              <a:defRPr sz="1000" b="1">
+                <a:solidFill>
+                  <a:srgbClr val="FFFFFF"/>
+                </a:solidFill>
+                <a:latin typeface="Aptos"/>
+              </a:defRPr>
+            </a:pPr>
+            <a:r>
+              <a:t>5 / 5</a:t>
+            </a:r>
+          </a:p>
+        </p:txBody>
+      </p:sp>
+      <p:sp>
+        <p:nvSpPr>
+          <p:cNvPr id="5" name="TextBox 4"/>
           <p:cNvSpPr txBox="1"/>
           <p:nvPr/>
         </p:nvSpPr>
         <p:spPr>
           <a:xfrm>
-            <a:off x="777240" y="1234440"/>
-            <a:ext cx="4983480" cy="2880360"/>
+            <a:off x="502920" y="6446520"/>
+            <a:ext cx="11155680" cy="228600"/>
           </a:xfrm>
           <a:prstGeom prst="rect">
             <a:avLst/>
@@ -6230,102 +7463,575 @@
           <a:noFill/>
         </p:spPr>
         <p:txBody>
-          <a:bodyPr wrap="square">
+          <a:bodyPr wrap="none">
+            <a:spAutoFit/>
+          </a:bodyPr>
+          <a:lstStyle/>
+          <a:p>
+            <a:pPr>
+              <a:defRPr sz="800">
+                <a:solidFill>
+                  <a:srgbClr val="616A74"/>
+                </a:solidFill>
+                <a:latin typeface="Aptos"/>
+              </a:defRPr>
+            </a:pPr>
+            <a:r>
+              <a:t>NOVA50301 AI Toolkit · Progress Meeting · 5/5</a:t>
+            </a:r>
+          </a:p>
+        </p:txBody>
+      </p:sp>
+      <p:sp>
+        <p:nvSpPr>
+          <p:cNvPr id="6" name="Rounded Rectangle 5"/>
+          <p:cNvSpPr/>
+          <p:nvPr/>
+        </p:nvSpPr>
+        <p:spPr>
+          <a:xfrm>
+            <a:off x="594360" y="1143000"/>
+            <a:ext cx="640080" cy="292608"/>
+          </a:xfrm>
+          <a:prstGeom prst="roundRect">
+            <a:avLst/>
+          </a:prstGeom>
+          <a:solidFill>
+            <a:srgbClr val="914348"/>
+          </a:solidFill>
+          <a:ln>
+            <a:noFill/>
+          </a:ln>
+        </p:spPr>
+        <p:style>
+          <a:lnRef idx="1">
+            <a:schemeClr val="accent1"/>
+          </a:lnRef>
+          <a:fillRef idx="3">
+            <a:schemeClr val="accent1"/>
+          </a:fillRef>
+          <a:effectRef idx="2">
+            <a:schemeClr val="accent1"/>
+          </a:effectRef>
+          <a:fontRef idx="minor">
+            <a:schemeClr val="lt1"/>
+          </a:fontRef>
+        </p:style>
+        <p:txBody>
+          <a:bodyPr rtlCol="0" anchor="ctr"/>
+          <a:lstStyle/>
+          <a:p>
+            <a:pPr algn="ctr">
+              <a:defRPr sz="1000" b="1">
+                <a:solidFill>
+                  <a:srgbClr val="FFFFFF"/>
+                </a:solidFill>
+                <a:latin typeface="Aptos"/>
+              </a:defRPr>
+            </a:pPr>
+            <a:r>
+              <a:t>WHY</a:t>
+            </a:r>
+          </a:p>
+        </p:txBody>
+      </p:sp>
+      <p:sp>
+        <p:nvSpPr>
+          <p:cNvPr id="7" name="Rounded Rectangle 6"/>
+          <p:cNvSpPr/>
+          <p:nvPr/>
+        </p:nvSpPr>
+        <p:spPr>
+          <a:xfrm>
+            <a:off x="594360" y="1554480"/>
+            <a:ext cx="10881360" cy="822960"/>
+          </a:xfrm>
+          <a:prstGeom prst="roundRect">
+            <a:avLst/>
+          </a:prstGeom>
+          <a:solidFill>
+            <a:srgbClr val="FFFFFF"/>
+          </a:solidFill>
+          <a:ln>
+            <a:solidFill>
+              <a:srgbClr val="D6DBE1"/>
+            </a:solidFill>
+          </a:ln>
+        </p:spPr>
+        <p:style>
+          <a:lnRef idx="1">
+            <a:schemeClr val="accent1"/>
+          </a:lnRef>
+          <a:fillRef idx="3">
+            <a:schemeClr val="accent1"/>
+          </a:fillRef>
+          <a:effectRef idx="2">
+            <a:schemeClr val="accent1"/>
+          </a:effectRef>
+          <a:fontRef idx="minor">
+            <a:schemeClr val="lt1"/>
+          </a:fontRef>
+        </p:style>
+        <p:txBody>
+          <a:bodyPr rtlCol="0" anchor="ctr" wrap="square">
             <a:normAutofit/>
           </a:bodyPr>
           <a:lstStyle/>
           <a:p>
+            <a:pPr algn="ctr">
+              <a:spcAft>
+                <a:spcPts val="400"/>
+              </a:spcAft>
+              <a:defRPr sz="1100" b="1">
+                <a:solidFill>
+                  <a:srgbClr val="1F2B3D"/>
+                </a:solidFill>
+                <a:latin typeface="Aptos"/>
+              </a:defRPr>
+            </a:pPr>
+            <a:r>
+              <a:t>현재 결과의 의미</a:t>
+            </a:r>
+          </a:p>
+          <a:p>
             <a:pPr>
+              <a:defRPr sz="1000">
+                <a:solidFill>
+                  <a:srgbClr val="272B32"/>
+                </a:solidFill>
+                <a:latin typeface="Aptos"/>
+              </a:defRPr>
+            </a:pPr>
+            <a:r>
+              <a:t>Hierarchical clustering은 권장과목 profile의 예비 구조를 보여주지만, 큰 군집과 singleton cluster의 해석에는 민감도 분석과 제한점 논의가 필요하다.</a:t>
+            </a:r>
+          </a:p>
+        </p:txBody>
+      </p:sp>
+      <p:sp>
+        <p:nvSpPr>
+          <p:cNvPr id="8" name="Rounded Rectangle 7"/>
+          <p:cNvSpPr/>
+          <p:nvPr/>
+        </p:nvSpPr>
+        <p:spPr>
+          <a:xfrm>
+            <a:off x="594360" y="2743200"/>
+            <a:ext cx="1828800" cy="292608"/>
+          </a:xfrm>
+          <a:prstGeom prst="roundRect">
+            <a:avLst/>
+          </a:prstGeom>
+          <a:solidFill>
+            <a:srgbClr val="1F2B3D"/>
+          </a:solidFill>
+          <a:ln>
+            <a:noFill/>
+          </a:ln>
+        </p:spPr>
+        <p:style>
+          <a:lnRef idx="1">
+            <a:schemeClr val="accent1"/>
+          </a:lnRef>
+          <a:fillRef idx="3">
+            <a:schemeClr val="accent1"/>
+          </a:fillRef>
+          <a:effectRef idx="2">
+            <a:schemeClr val="accent1"/>
+          </a:effectRef>
+          <a:fontRef idx="minor">
+            <a:schemeClr val="lt1"/>
+          </a:fontRef>
+        </p:style>
+        <p:txBody>
+          <a:bodyPr rtlCol="0" anchor="ctr"/>
+          <a:lstStyle/>
+          <a:p>
+            <a:pPr algn="ctr">
+              <a:defRPr sz="1000" b="1">
+                <a:solidFill>
+                  <a:srgbClr val="FFFFFF"/>
+                </a:solidFill>
+                <a:latin typeface="Aptos"/>
+              </a:defRPr>
+            </a:pPr>
+            <a:r>
+              <a:t>Final Report Roadmap</a:t>
+            </a:r>
+          </a:p>
+        </p:txBody>
+      </p:sp>
+      <p:sp>
+        <p:nvSpPr>
+          <p:cNvPr id="9" name="Rounded Rectangle 8"/>
+          <p:cNvSpPr/>
+          <p:nvPr/>
+        </p:nvSpPr>
+        <p:spPr>
+          <a:xfrm>
+            <a:off x="594360" y="3182112"/>
+            <a:ext cx="2514600" cy="914400"/>
+          </a:xfrm>
+          <a:prstGeom prst="roundRect">
+            <a:avLst/>
+          </a:prstGeom>
+          <a:solidFill>
+            <a:srgbClr val="E0F2EE"/>
+          </a:solidFill>
+          <a:ln>
+            <a:solidFill>
+              <a:srgbClr val="D6DBE1"/>
+            </a:solidFill>
+          </a:ln>
+        </p:spPr>
+        <p:style>
+          <a:lnRef idx="1">
+            <a:schemeClr val="accent1"/>
+          </a:lnRef>
+          <a:fillRef idx="3">
+            <a:schemeClr val="accent1"/>
+          </a:fillRef>
+          <a:effectRef idx="2">
+            <a:schemeClr val="accent1"/>
+          </a:effectRef>
+          <a:fontRef idx="minor">
+            <a:schemeClr val="lt1"/>
+          </a:fontRef>
+        </p:style>
+        <p:txBody>
+          <a:bodyPr rtlCol="0" anchor="ctr" wrap="square">
+            <a:normAutofit/>
+          </a:bodyPr>
+          <a:lstStyle/>
+          <a:p>
+            <a:pPr algn="ctr">
               <a:spcAft>
-                <a:spcPts val="700"/>
+                <a:spcPts val="400"/>
               </a:spcAft>
-              <a:defRPr sz="1700">
-                <a:solidFill>
-                  <a:srgbClr val="262A30"/>
+              <a:defRPr sz="1100" b="1">
+                <a:solidFill>
+                  <a:srgbClr val="1F2B3D"/>
                 </a:solidFill>
                 <a:latin typeface="Aptos"/>
               </a:defRPr>
             </a:pPr>
             <a:r>
-              <a:t>Compare hierarchical clustering with k-means clustering</a:t>
+              <a:t>W13</a:t>
             </a:r>
           </a:p>
           <a:p>
             <a:pPr>
+              <a:defRPr sz="1000">
+                <a:solidFill>
+                  <a:srgbClr val="272B32"/>
+                </a:solidFill>
+                <a:latin typeface="Aptos"/>
+              </a:defRPr>
+            </a:pPr>
+            <a:r>
+              <a:t>Progress 발표</a:t>
+            </a:r>
+            <a:br/>
+            <a:r>
+              <a:t>현재 결과 점검</a:t>
+            </a:r>
+          </a:p>
+        </p:txBody>
+      </p:sp>
+      <p:sp>
+        <p:nvSpPr>
+          <p:cNvPr id="10" name="Rounded Rectangle 9"/>
+          <p:cNvSpPr/>
+          <p:nvPr/>
+        </p:nvSpPr>
+        <p:spPr>
+          <a:xfrm>
+            <a:off x="3337560" y="3182112"/>
+            <a:ext cx="2514600" cy="914400"/>
+          </a:xfrm>
+          <a:prstGeom prst="roundRect">
+            <a:avLst/>
+          </a:prstGeom>
+          <a:solidFill>
+            <a:srgbClr val="F4F6F8"/>
+          </a:solidFill>
+          <a:ln>
+            <a:solidFill>
+              <a:srgbClr val="D6DBE1"/>
+            </a:solidFill>
+          </a:ln>
+        </p:spPr>
+        <p:style>
+          <a:lnRef idx="1">
+            <a:schemeClr val="accent1"/>
+          </a:lnRef>
+          <a:fillRef idx="3">
+            <a:schemeClr val="accent1"/>
+          </a:fillRef>
+          <a:effectRef idx="2">
+            <a:schemeClr val="accent1"/>
+          </a:effectRef>
+          <a:fontRef idx="minor">
+            <a:schemeClr val="lt1"/>
+          </a:fontRef>
+        </p:style>
+        <p:txBody>
+          <a:bodyPr rtlCol="0" anchor="ctr" wrap="square">
+            <a:normAutofit/>
+          </a:bodyPr>
+          <a:lstStyle/>
+          <a:p>
+            <a:pPr algn="ctr">
               <a:spcAft>
-                <a:spcPts val="700"/>
+                <a:spcPts val="400"/>
               </a:spcAft>
-              <a:defRPr sz="1700">
-                <a:solidFill>
-                  <a:srgbClr val="262A30"/>
+              <a:defRPr sz="1100" b="1">
+                <a:solidFill>
+                  <a:srgbClr val="1F2B3D"/>
                 </a:solidFill>
                 <a:latin typeface="Aptos"/>
               </a:defRPr>
             </a:pPr>
             <a:r>
-              <a:t>Conduct sensitivity analysis using binary course vectors</a:t>
+              <a:t>W14</a:t>
             </a:r>
           </a:p>
           <a:p>
             <a:pPr>
+              <a:defRPr sz="1000">
+                <a:solidFill>
+                  <a:srgbClr val="272B32"/>
+                </a:solidFill>
+                <a:latin typeface="Aptos"/>
+              </a:defRPr>
+            </a:pPr>
+            <a:r>
+              <a:t>k-means 비교</a:t>
+            </a:r>
+            <a:br/>
+            <a:r>
+              <a:t>cluster 수 민감도</a:t>
+            </a:r>
+          </a:p>
+        </p:txBody>
+      </p:sp>
+      <p:sp>
+        <p:nvSpPr>
+          <p:cNvPr id="11" name="Rounded Rectangle 10"/>
+          <p:cNvSpPr/>
+          <p:nvPr/>
+        </p:nvSpPr>
+        <p:spPr>
+          <a:xfrm>
+            <a:off x="6080760" y="3182112"/>
+            <a:ext cx="2514600" cy="914400"/>
+          </a:xfrm>
+          <a:prstGeom prst="roundRect">
+            <a:avLst/>
+          </a:prstGeom>
+          <a:solidFill>
+            <a:srgbClr val="F4F6F8"/>
+          </a:solidFill>
+          <a:ln>
+            <a:solidFill>
+              <a:srgbClr val="D6DBE1"/>
+            </a:solidFill>
+          </a:ln>
+        </p:spPr>
+        <p:style>
+          <a:lnRef idx="1">
+            <a:schemeClr val="accent1"/>
+          </a:lnRef>
+          <a:fillRef idx="3">
+            <a:schemeClr val="accent1"/>
+          </a:fillRef>
+          <a:effectRef idx="2">
+            <a:schemeClr val="accent1"/>
+          </a:effectRef>
+          <a:fontRef idx="minor">
+            <a:schemeClr val="lt1"/>
+          </a:fontRef>
+        </p:style>
+        <p:txBody>
+          <a:bodyPr rtlCol="0" anchor="ctr" wrap="square">
+            <a:normAutofit/>
+          </a:bodyPr>
+          <a:lstStyle/>
+          <a:p>
+            <a:pPr algn="ctr">
               <a:spcAft>
-                <a:spcPts val="700"/>
+                <a:spcPts val="400"/>
               </a:spcAft>
-              <a:defRPr sz="1700">
-                <a:solidFill>
-                  <a:srgbClr val="262A30"/>
+              <a:defRPr sz="1100" b="1">
+                <a:solidFill>
+                  <a:srgbClr val="1F2B3D"/>
                 </a:solidFill>
                 <a:latin typeface="Aptos"/>
               </a:defRPr>
             </a:pPr>
             <a:r>
-              <a:t>Refine interpretation of cluster characteristics</a:t>
+              <a:t>W15</a:t>
             </a:r>
           </a:p>
           <a:p>
             <a:pPr>
+              <a:defRPr sz="1000">
+                <a:solidFill>
+                  <a:srgbClr val="272B32"/>
+                </a:solidFill>
+                <a:latin typeface="Aptos"/>
+              </a:defRPr>
+            </a:pPr>
+            <a:r>
+              <a:t>결과 해석 정리</a:t>
+            </a:r>
+            <a:br/>
+            <a:r>
+              <a:t>한계와 boundary case</a:t>
+            </a:r>
+          </a:p>
+        </p:txBody>
+      </p:sp>
+      <p:sp>
+        <p:nvSpPr>
+          <p:cNvPr id="12" name="Rounded Rectangle 11"/>
+          <p:cNvSpPr/>
+          <p:nvPr/>
+        </p:nvSpPr>
+        <p:spPr>
+          <a:xfrm>
+            <a:off x="8823960" y="3182112"/>
+            <a:ext cx="2514600" cy="914400"/>
+          </a:xfrm>
+          <a:prstGeom prst="roundRect">
+            <a:avLst/>
+          </a:prstGeom>
+          <a:solidFill>
+            <a:srgbClr val="F9EFDC"/>
+          </a:solidFill>
+          <a:ln>
+            <a:solidFill>
+              <a:srgbClr val="D6DBE1"/>
+            </a:solidFill>
+          </a:ln>
+        </p:spPr>
+        <p:style>
+          <a:lnRef idx="1">
+            <a:schemeClr val="accent1"/>
+          </a:lnRef>
+          <a:fillRef idx="3">
+            <a:schemeClr val="accent1"/>
+          </a:fillRef>
+          <a:effectRef idx="2">
+            <a:schemeClr val="accent1"/>
+          </a:effectRef>
+          <a:fontRef idx="minor">
+            <a:schemeClr val="lt1"/>
+          </a:fontRef>
+        </p:style>
+        <p:txBody>
+          <a:bodyPr rtlCol="0" anchor="ctr" wrap="square">
+            <a:normAutofit/>
+          </a:bodyPr>
+          <a:lstStyle/>
+          <a:p>
+            <a:pPr algn="ctr">
               <a:spcAft>
-                <a:spcPts val="700"/>
+                <a:spcPts val="400"/>
               </a:spcAft>
-              <a:defRPr sz="1700">
-                <a:solidFill>
-                  <a:srgbClr val="262A30"/>
+              <a:defRPr sz="1100" b="1">
+                <a:solidFill>
+                  <a:srgbClr val="1F2B3D"/>
                 </a:solidFill>
                 <a:latin typeface="Aptos"/>
               </a:defRPr>
             </a:pPr>
             <a:r>
-              <a:t>Optionally compare data-driven clusters with expert-based grouping</a:t>
+              <a:t>W16</a:t>
             </a:r>
           </a:p>
           <a:p>
             <a:pPr>
-              <a:spcAft>
-                <a:spcPts val="700"/>
-              </a:spcAft>
-              <a:defRPr sz="1700">
-                <a:solidFill>
-                  <a:srgbClr val="262A30"/>
+              <a:defRPr sz="1000">
+                <a:solidFill>
+                  <a:srgbClr val="272B32"/>
                 </a:solidFill>
                 <a:latin typeface="Aptos"/>
               </a:defRPr>
             </a:pPr>
             <a:r>
-              <a:t>Position expert consensus and admission feasibility as future work</a:t>
-            </a:r>
-          </a:p>
-        </p:txBody>
-      </p:sp>
-      <p:sp>
-        <p:nvSpPr>
-          <p:cNvPr id="5" name="TextBox 4"/>
+              <a:t>5-page final report</a:t>
+            </a:r>
+            <a:br/>
+            <a:r>
+              <a:t>Future work 정리</a:t>
+            </a:r>
+          </a:p>
+        </p:txBody>
+      </p:sp>
+      <p:sp>
+        <p:nvSpPr>
+          <p:cNvPr id="13" name="Rounded Rectangle 12"/>
+          <p:cNvSpPr/>
+          <p:nvPr/>
+        </p:nvSpPr>
+        <p:spPr>
+          <a:xfrm>
+            <a:off x="594360" y="4800600"/>
+            <a:ext cx="1234440" cy="292608"/>
+          </a:xfrm>
+          <a:prstGeom prst="roundRect">
+            <a:avLst/>
+          </a:prstGeom>
+          <a:solidFill>
+            <a:srgbClr val="208782"/>
+          </a:solidFill>
+          <a:ln>
+            <a:noFill/>
+          </a:ln>
+        </p:spPr>
+        <p:style>
+          <a:lnRef idx="1">
+            <a:schemeClr val="accent1"/>
+          </a:lnRef>
+          <a:fillRef idx="3">
+            <a:schemeClr val="accent1"/>
+          </a:fillRef>
+          <a:effectRef idx="2">
+            <a:schemeClr val="accent1"/>
+          </a:effectRef>
+          <a:fontRef idx="minor">
+            <a:schemeClr val="lt1"/>
+          </a:fontRef>
+        </p:style>
+        <p:txBody>
+          <a:bodyPr rtlCol="0" anchor="ctr"/>
+          <a:lstStyle/>
+          <a:p>
+            <a:pPr algn="ctr">
+              <a:defRPr sz="1000" b="1">
+                <a:solidFill>
+                  <a:srgbClr val="FFFFFF"/>
+                </a:solidFill>
+                <a:latin typeface="Aptos"/>
+              </a:defRPr>
+            </a:pPr>
+            <a:r>
+              <a:t>Future Work</a:t>
+            </a:r>
+          </a:p>
+        </p:txBody>
+      </p:sp>
+      <p:sp>
+        <p:nvSpPr>
+          <p:cNvPr id="14" name="TextBox 13"/>
           <p:cNvSpPr txBox="1"/>
           <p:nvPr/>
         </p:nvSpPr>
         <p:spPr>
           <a:xfrm>
-            <a:off x="502920" y="6446520"/>
-            <a:ext cx="11064240" cy="201168"/>
+            <a:off x="685800" y="5230368"/>
+            <a:ext cx="10424160" cy="731520"/>
           </a:xfrm>
           <a:prstGeom prst="rect">
             <a:avLst/>
@@ -6333,391 +8039,56 @@
           <a:noFill/>
         </p:spPr>
         <p:txBody>
-          <a:bodyPr wrap="none">
-            <a:spAutoFit/>
+          <a:bodyPr wrap="square">
+            <a:normAutofit/>
           </a:bodyPr>
           <a:lstStyle/>
           <a:p>
             <a:pPr>
-              <a:defRPr sz="800">
-                <a:solidFill>
-                  <a:srgbClr val="636C76"/>
+              <a:spcAft>
+                <a:spcPts val="500"/>
+              </a:spcAft>
+              <a:defRPr sz="1200">
+                <a:solidFill>
+                  <a:srgbClr val="272B32"/>
                 </a:solidFill>
                 <a:latin typeface="Aptos"/>
               </a:defRPr>
             </a:pPr>
             <a:r>
-              <a:t>NOVA50301 AI Toolkit Progress Meeting | 5/5</a:t>
-            </a:r>
-          </a:p>
-        </p:txBody>
-      </p:sp>
-      <p:graphicFrame>
-        <p:nvGraphicFramePr>
-          <p:cNvPr id="6" name="Table 5"/>
-          <p:cNvGraphicFramePr>
-            <a:graphicFrameLocks noGrp="1"/>
-          </p:cNvGraphicFramePr>
-          <p:nvPr/>
-        </p:nvGraphicFramePr>
-        <p:xfrm>
-          <a:off x="777240" y="3703320"/>
-          <a:ext cx="10607040" cy="1783080"/>
-        </p:xfrm>
-        <a:graphic>
-          <a:graphicData uri="http://schemas.openxmlformats.org/drawingml/2006/table">
-            <a:tbl>
-              <a:tblPr firstRow="1" bandRow="1">
-                <a:tableStyleId>{5C22544A-7EE6-4342-B048-85BDC9FD1C3A}</a:tableStyleId>
-              </a:tblPr>
-              <a:tblGrid>
-                <a:gridCol w="3535680"/>
-                <a:gridCol w="3535680"/>
-                <a:gridCol w="3535680"/>
-              </a:tblGrid>
-              <a:tr h="356616">
-                <a:tc>
-                  <a:txBody>
-                    <a:bodyPr/>
-                    <a:lstStyle/>
-                    <a:p>
-                      <a:pPr>
-                        <a:defRPr b="1" sz="1000">
-                          <a:solidFill>
-                            <a:srgbClr val="FFFFFF"/>
-                          </a:solidFill>
-                        </a:defRPr>
-                      </a:pPr>
-                      <a:r>
-                        <a:t>Stage</a:t>
-                      </a:r>
-                    </a:p>
-                  </a:txBody>
-                  <a:tcPr>
-                    <a:solidFill>
-                      <a:srgbClr val="202D3F"/>
-                    </a:solidFill>
-                  </a:tcPr>
-                </a:tc>
-                <a:tc>
-                  <a:txBody>
-                    <a:bodyPr/>
-                    <a:lstStyle/>
-                    <a:p>
-                      <a:pPr>
-                        <a:defRPr b="1" sz="1000">
-                          <a:solidFill>
-                            <a:srgbClr val="FFFFFF"/>
-                          </a:solidFill>
-                        </a:defRPr>
-                      </a:pPr>
-                      <a:r>
-                        <a:t>Task</a:t>
-                      </a:r>
-                    </a:p>
-                  </a:txBody>
-                  <a:tcPr>
-                    <a:solidFill>
-                      <a:srgbClr val="202D3F"/>
-                    </a:solidFill>
-                  </a:tcPr>
-                </a:tc>
-                <a:tc>
-                  <a:txBody>
-                    <a:bodyPr/>
-                    <a:lstStyle/>
-                    <a:p>
-                      <a:pPr>
-                        <a:defRPr b="1" sz="1000">
-                          <a:solidFill>
-                            <a:srgbClr val="FFFFFF"/>
-                          </a:solidFill>
-                        </a:defRPr>
-                      </a:pPr>
-                      <a:r>
-                        <a:t>Purpose</a:t>
-                      </a:r>
-                    </a:p>
-                  </a:txBody>
-                  <a:tcPr>
-                    <a:solidFill>
-                      <a:srgbClr val="202D3F"/>
-                    </a:solidFill>
-                  </a:tcPr>
-                </a:tc>
-              </a:tr>
-              <a:tr h="356616">
-                <a:tc>
-                  <a:txBody>
-                    <a:bodyPr/>
-                    <a:lstStyle/>
-                    <a:p>
-                      <a:pPr>
-                        <a:defRPr sz="900">
-                          <a:solidFill>
-                            <a:srgbClr val="262A30"/>
-                          </a:solidFill>
-                        </a:defRPr>
-                      </a:pPr>
-                      <a:r>
-                        <a:t>Current</a:t>
-                      </a:r>
-                    </a:p>
-                  </a:txBody>
-                  <a:tcPr/>
-                </a:tc>
-                <a:tc>
-                  <a:txBody>
-                    <a:bodyPr/>
-                    <a:lstStyle/>
-                    <a:p>
-                      <a:pPr>
-                        <a:defRPr sz="900">
-                          <a:solidFill>
-                            <a:srgbClr val="262A30"/>
-                          </a:solidFill>
-                        </a:defRPr>
-                      </a:pPr>
-                      <a:r>
-                        <a:t>Hierarchical clustering</a:t>
-                      </a:r>
-                    </a:p>
-                  </a:txBody>
-                  <a:tcPr/>
-                </a:tc>
-                <a:tc>
-                  <a:txBody>
-                    <a:bodyPr/>
-                    <a:lstStyle/>
-                    <a:p>
-                      <a:pPr>
-                        <a:defRPr sz="900">
-                          <a:solidFill>
-                            <a:srgbClr val="262A30"/>
-                          </a:solidFill>
-                        </a:defRPr>
-                      </a:pPr>
-                      <a:r>
-                        <a:t>Initial exploratory grouping</a:t>
-                      </a:r>
-                    </a:p>
-                  </a:txBody>
-                  <a:tcPr/>
-                </a:tc>
-              </a:tr>
-              <a:tr h="356616">
-                <a:tc>
-                  <a:txBody>
-                    <a:bodyPr/>
-                    <a:lstStyle/>
-                    <a:p>
-                      <a:pPr>
-                        <a:defRPr sz="900">
-                          <a:solidFill>
-                            <a:srgbClr val="262A30"/>
-                          </a:solidFill>
-                        </a:defRPr>
-                      </a:pPr>
-                      <a:r>
-                        <a:t>Next</a:t>
-                      </a:r>
-                    </a:p>
-                  </a:txBody>
-                  <a:tcPr/>
-                </a:tc>
-                <a:tc>
-                  <a:txBody>
-                    <a:bodyPr/>
-                    <a:lstStyle/>
-                    <a:p>
-                      <a:pPr>
-                        <a:defRPr sz="900">
-                          <a:solidFill>
-                            <a:srgbClr val="262A30"/>
-                          </a:solidFill>
-                        </a:defRPr>
-                      </a:pPr>
-                      <a:r>
-                        <a:t>K-means comparison</a:t>
-                      </a:r>
-                    </a:p>
-                  </a:txBody>
-                  <a:tcPr/>
-                </a:tc>
-                <a:tc>
-                  <a:txBody>
-                    <a:bodyPr/>
-                    <a:lstStyle/>
-                    <a:p>
-                      <a:pPr>
-                        <a:defRPr sz="900">
-                          <a:solidFill>
-                            <a:srgbClr val="262A30"/>
-                          </a:solidFill>
-                        </a:defRPr>
-                      </a:pPr>
-                      <a:r>
-                        <a:t>Check method stability</a:t>
-                      </a:r>
-                    </a:p>
-                  </a:txBody>
-                  <a:tcPr/>
-                </a:tc>
-              </a:tr>
-              <a:tr h="356616">
-                <a:tc>
-                  <a:txBody>
-                    <a:bodyPr/>
-                    <a:lstStyle/>
-                    <a:p>
-                      <a:pPr>
-                        <a:defRPr sz="900">
-                          <a:solidFill>
-                            <a:srgbClr val="262A30"/>
-                          </a:solidFill>
-                        </a:defRPr>
-                      </a:pPr>
-                      <a:r>
-                        <a:t>Next</a:t>
-                      </a:r>
-                    </a:p>
-                  </a:txBody>
-                  <a:tcPr/>
-                </a:tc>
-                <a:tc>
-                  <a:txBody>
-                    <a:bodyPr/>
-                    <a:lstStyle/>
-                    <a:p>
-                      <a:pPr>
-                        <a:defRPr sz="900">
-                          <a:solidFill>
-                            <a:srgbClr val="262A30"/>
-                          </a:solidFill>
-                        </a:defRPr>
-                      </a:pPr>
-                      <a:r>
-                        <a:t>Binary-vector sensitivity</a:t>
-                      </a:r>
-                    </a:p>
-                  </a:txBody>
-                  <a:tcPr/>
-                </a:tc>
-                <a:tc>
-                  <a:txBody>
-                    <a:bodyPr/>
-                    <a:lstStyle/>
-                    <a:p>
-                      <a:pPr>
-                        <a:defRPr sz="900">
-                          <a:solidFill>
-                            <a:srgbClr val="262A30"/>
-                          </a:solidFill>
-                        </a:defRPr>
-                      </a:pPr>
-                      <a:r>
-                        <a:t>Test value-coding sensitivity</a:t>
-                      </a:r>
-                    </a:p>
-                  </a:txBody>
-                  <a:tcPr/>
-                </a:tc>
-              </a:tr>
-              <a:tr h="356616">
-                <a:tc>
-                  <a:txBody>
-                    <a:bodyPr/>
-                    <a:lstStyle/>
-                    <a:p>
-                      <a:pPr>
-                        <a:defRPr sz="900">
-                          <a:solidFill>
-                            <a:srgbClr val="262A30"/>
-                          </a:solidFill>
-                        </a:defRPr>
-                      </a:pPr>
-                      <a:r>
-                        <a:t>Optional</a:t>
-                      </a:r>
-                    </a:p>
-                  </a:txBody>
-                  <a:tcPr/>
-                </a:tc>
-                <a:tc>
-                  <a:txBody>
-                    <a:bodyPr/>
-                    <a:lstStyle/>
-                    <a:p>
-                      <a:pPr>
-                        <a:defRPr sz="900">
-                          <a:solidFill>
-                            <a:srgbClr val="262A30"/>
-                          </a:solidFill>
-                        </a:defRPr>
-                      </a:pPr>
-                      <a:r>
-                        <a:t>Expert-based comparison</a:t>
-                      </a:r>
-                    </a:p>
-                  </a:txBody>
-                  <a:tcPr/>
-                </a:tc>
-                <a:tc>
-                  <a:txBody>
-                    <a:bodyPr/>
-                    <a:lstStyle/>
-                    <a:p>
-                      <a:pPr>
-                        <a:defRPr sz="900">
-                          <a:solidFill>
-                            <a:srgbClr val="262A30"/>
-                          </a:solidFill>
-                        </a:defRPr>
-                      </a:pPr>
-                      <a:r>
-                        <a:t>Validate interpretability</a:t>
-                      </a:r>
-                    </a:p>
-                  </a:txBody>
-                  <a:tcPr/>
-                </a:tc>
-              </a:tr>
-            </a:tbl>
-          </a:graphicData>
-        </a:graphic>
-      </p:graphicFrame>
-      <p:sp>
-        <p:nvSpPr>
-          <p:cNvPr id="7" name="TextBox 6"/>
-          <p:cNvSpPr txBox="1"/>
-          <p:nvPr/>
-        </p:nvSpPr>
-        <p:spPr>
-          <a:xfrm>
-            <a:off x="777240" y="5596128"/>
-            <a:ext cx="7772400" cy="228600"/>
-          </a:xfrm>
-          <a:prstGeom prst="rect">
-            <a:avLst/>
-          </a:prstGeom>
-          <a:noFill/>
-        </p:spPr>
-        <p:txBody>
-          <a:bodyPr wrap="square">
-            <a:spAutoFit/>
-          </a:bodyPr>
-          <a:lstStyle/>
+              <a:t>Expert consensus, admission score feasibility, candidate generation은 future work</a:t>
+            </a:r>
+          </a:p>
           <a:p>
             <a:pPr>
-              <a:defRPr sz="1000">
-                <a:solidFill>
-                  <a:srgbClr val="636C76"/>
+              <a:spcAft>
+                <a:spcPts val="500"/>
+              </a:spcAft>
+              <a:defRPr sz="1200">
+                <a:solidFill>
+                  <a:srgbClr val="272B32"/>
                 </a:solidFill>
                 <a:latin typeface="Aptos"/>
               </a:defRPr>
             </a:pPr>
             <a:r>
-              <a:t>Recommended table: final-project analysis roadmap</a:t>
+              <a:t>현재 Progress 단계는 department-course matrix와 clustering 결과에 제한</a:t>
+            </a:r>
+          </a:p>
+          <a:p>
+            <a:pPr>
+              <a:spcAft>
+                <a:spcPts val="500"/>
+              </a:spcAft>
+              <a:defRPr sz="1200">
+                <a:solidFill>
+                  <a:srgbClr val="272B32"/>
+                </a:solidFill>
+                <a:latin typeface="Aptos"/>
+              </a:defRPr>
+            </a:pPr>
+            <a:r>
+              <a:t>최종 주장은 '자동 추천'이 아니라 '상담 지원을 위한 해석 가능한 유사성 탐색'</a:t>
             </a:r>
           </a:p>
         </p:txBody>
